--- a/exports/pptx/lessons/middle-module-01-what-is-iks/day-02-vedas.pptx
+++ b/exports/pptx/lessons/middle-module-01-what-is-iks/day-02-vedas.pptx
@@ -17,9 +17,15 @@
     <p:sldId id="265" r:id="rId11"/>
     <p:sldId id="266" r:id="rId12"/>
     <p:sldId id="267" r:id="rId13"/>
+    <p:sldId id="268" r:id="rId14"/>
+    <p:sldId id="269" r:id="rId15"/>
+    <p:sldId id="270" r:id="rId16"/>
+    <p:sldId id="271" r:id="rId17"/>
+    <p:sldId id="272" r:id="rId18"/>
+    <p:sldId id="273" r:id="rId19"/>
   </p:sldIdLst>
   <p:notesMasterIdLst>
-    <p:notesMasterId r:id="rId14"/>
+    <p:notesMasterId r:id="rId20"/>
   </p:notesMasterIdLst>
   <p:sldSz cx="9144000" cy="5143500"/>
   <p:notesSz cx="5143500" cy="9144000"/>
@@ -801,6 +807,534 @@
             <a:fld id="{F7021451-1387-4CA6-816F-3879F97B5CBC}" type="slidenum">
               <a:rPr lang="en-US"/>
               <a:t>12</a:t>
+            </a:fld>
+            <a:endParaRPr lang="en-US"/>
+          </a:p>
+        </p:txBody>
+      </p:sp>
+    </p:spTree>
+    <p:extLst>
+      <p:ext uri="{BB962C8B-B14F-4D97-AF65-F5344CB8AC3E}">
+        <p14:creationId xmlns:p14="http://schemas.microsoft.com/office/powerpoint/2010/main" val="1024086991"/>
+      </p:ext>
+    </p:extLst>
+  </p:cSld>
+  <p:clrMapOvr>
+    <a:masterClrMapping/>
+  </p:clrMapOvr>
+</p:notes>
+</file>
+
+<file path=ppt/notesSlides/notesSlide13.xml><?xml version="1.0" encoding="utf-8"?>
+<p:notes xmlns:a="http://schemas.openxmlformats.org/drawingml/2006/main" xmlns:r="http://schemas.openxmlformats.org/officeDocument/2006/relationships" xmlns:p="http://schemas.openxmlformats.org/presentationml/2006/main">
+  <p:cSld>
+    <p:spTree>
+      <p:nvGrpSpPr>
+        <p:cNvPr id="1" name=""/>
+        <p:cNvGrpSpPr/>
+        <p:nvPr/>
+      </p:nvGrpSpPr>
+      <p:grpSpPr>
+        <a:xfrm>
+          <a:off x="0" y="0"/>
+          <a:ext cx="0" cy="0"/>
+          <a:chOff x="0" y="0"/>
+          <a:chExt cx="0" cy="0"/>
+        </a:xfrm>
+      </p:grpSpPr>
+      <p:sp>
+        <p:nvSpPr>
+          <p:cNvPr id="2" name="Slide Image Placeholder 1"/>
+          <p:cNvSpPr>
+            <a:spLocks noGrp="1" noRot="1" noChangeAspect="1"/>
+          </p:cNvSpPr>
+          <p:nvPr>
+            <p:ph type="sldImg"/>
+          </p:nvPr>
+        </p:nvSpPr>
+        <p:spPr/>
+      </p:sp>
+      <p:sp>
+        <p:nvSpPr>
+          <p:cNvPr id="3" name="Notes Placeholder 2"/>
+          <p:cNvSpPr>
+            <a:spLocks noGrp="1"/>
+          </p:cNvSpPr>
+          <p:nvPr>
+            <p:ph type="body" idx="1"/>
+          </p:nvPr>
+        </p:nvSpPr>
+        <p:spPr/>
+        <p:txBody>
+          <a:bodyPr/>
+          <a:lstStyle/>
+          <a:p>
+            <a:r>
+              <a:rPr lang="en-US" dirty="0"/>
+              <a:t/>
+            </a:r>
+            <a:endParaRPr lang="en-US" dirty="0"/>
+          </a:p>
+        </p:txBody>
+      </p:sp>
+      <p:sp>
+        <p:nvSpPr>
+          <p:cNvPr id="4" name="Slide Number Placeholder 3"/>
+          <p:cNvSpPr>
+            <a:spLocks noGrp="1"/>
+          </p:cNvSpPr>
+          <p:nvPr>
+            <p:ph type="sldNum" sz="quarter" idx="10"/>
+          </p:nvPr>
+        </p:nvSpPr>
+        <p:spPr/>
+        <p:txBody>
+          <a:bodyPr/>
+          <a:lstStyle/>
+          <a:p>
+            <a:fld id="{F7021451-1387-4CA6-816F-3879F97B5CBC}" type="slidenum">
+              <a:rPr lang="en-US"/>
+              <a:t>13</a:t>
+            </a:fld>
+            <a:endParaRPr lang="en-US"/>
+          </a:p>
+        </p:txBody>
+      </p:sp>
+    </p:spTree>
+    <p:extLst>
+      <p:ext uri="{BB962C8B-B14F-4D97-AF65-F5344CB8AC3E}">
+        <p14:creationId xmlns:p14="http://schemas.microsoft.com/office/powerpoint/2010/main" val="1024086991"/>
+      </p:ext>
+    </p:extLst>
+  </p:cSld>
+  <p:clrMapOvr>
+    <a:masterClrMapping/>
+  </p:clrMapOvr>
+</p:notes>
+</file>
+
+<file path=ppt/notesSlides/notesSlide14.xml><?xml version="1.0" encoding="utf-8"?>
+<p:notes xmlns:a="http://schemas.openxmlformats.org/drawingml/2006/main" xmlns:r="http://schemas.openxmlformats.org/officeDocument/2006/relationships" xmlns:p="http://schemas.openxmlformats.org/presentationml/2006/main">
+  <p:cSld>
+    <p:spTree>
+      <p:nvGrpSpPr>
+        <p:cNvPr id="1" name=""/>
+        <p:cNvGrpSpPr/>
+        <p:nvPr/>
+      </p:nvGrpSpPr>
+      <p:grpSpPr>
+        <a:xfrm>
+          <a:off x="0" y="0"/>
+          <a:ext cx="0" cy="0"/>
+          <a:chOff x="0" y="0"/>
+          <a:chExt cx="0" cy="0"/>
+        </a:xfrm>
+      </p:grpSpPr>
+      <p:sp>
+        <p:nvSpPr>
+          <p:cNvPr id="2" name="Slide Image Placeholder 1"/>
+          <p:cNvSpPr>
+            <a:spLocks noGrp="1" noRot="1" noChangeAspect="1"/>
+          </p:cNvSpPr>
+          <p:nvPr>
+            <p:ph type="sldImg"/>
+          </p:nvPr>
+        </p:nvSpPr>
+        <p:spPr/>
+      </p:sp>
+      <p:sp>
+        <p:nvSpPr>
+          <p:cNvPr id="3" name="Notes Placeholder 2"/>
+          <p:cNvSpPr>
+            <a:spLocks noGrp="1"/>
+          </p:cNvSpPr>
+          <p:nvPr>
+            <p:ph type="body" idx="1"/>
+          </p:nvPr>
+        </p:nvSpPr>
+        <p:spPr/>
+        <p:txBody>
+          <a:bodyPr/>
+          <a:lstStyle/>
+          <a:p>
+            <a:r>
+              <a:rPr lang="en-US" dirty="0"/>
+              <a:t/>
+            </a:r>
+            <a:endParaRPr lang="en-US" dirty="0"/>
+          </a:p>
+        </p:txBody>
+      </p:sp>
+      <p:sp>
+        <p:nvSpPr>
+          <p:cNvPr id="4" name="Slide Number Placeholder 3"/>
+          <p:cNvSpPr>
+            <a:spLocks noGrp="1"/>
+          </p:cNvSpPr>
+          <p:nvPr>
+            <p:ph type="sldNum" sz="quarter" idx="10"/>
+          </p:nvPr>
+        </p:nvSpPr>
+        <p:spPr/>
+        <p:txBody>
+          <a:bodyPr/>
+          <a:lstStyle/>
+          <a:p>
+            <a:fld id="{F7021451-1387-4CA6-816F-3879F97B5CBC}" type="slidenum">
+              <a:rPr lang="en-US"/>
+              <a:t>14</a:t>
+            </a:fld>
+            <a:endParaRPr lang="en-US"/>
+          </a:p>
+        </p:txBody>
+      </p:sp>
+    </p:spTree>
+    <p:extLst>
+      <p:ext uri="{BB962C8B-B14F-4D97-AF65-F5344CB8AC3E}">
+        <p14:creationId xmlns:p14="http://schemas.microsoft.com/office/powerpoint/2010/main" val="1024086991"/>
+      </p:ext>
+    </p:extLst>
+  </p:cSld>
+  <p:clrMapOvr>
+    <a:masterClrMapping/>
+  </p:clrMapOvr>
+</p:notes>
+</file>
+
+<file path=ppt/notesSlides/notesSlide15.xml><?xml version="1.0" encoding="utf-8"?>
+<p:notes xmlns:a="http://schemas.openxmlformats.org/drawingml/2006/main" xmlns:r="http://schemas.openxmlformats.org/officeDocument/2006/relationships" xmlns:p="http://schemas.openxmlformats.org/presentationml/2006/main">
+  <p:cSld>
+    <p:spTree>
+      <p:nvGrpSpPr>
+        <p:cNvPr id="1" name=""/>
+        <p:cNvGrpSpPr/>
+        <p:nvPr/>
+      </p:nvGrpSpPr>
+      <p:grpSpPr>
+        <a:xfrm>
+          <a:off x="0" y="0"/>
+          <a:ext cx="0" cy="0"/>
+          <a:chOff x="0" y="0"/>
+          <a:chExt cx="0" cy="0"/>
+        </a:xfrm>
+      </p:grpSpPr>
+      <p:sp>
+        <p:nvSpPr>
+          <p:cNvPr id="2" name="Slide Image Placeholder 1"/>
+          <p:cNvSpPr>
+            <a:spLocks noGrp="1" noRot="1" noChangeAspect="1"/>
+          </p:cNvSpPr>
+          <p:nvPr>
+            <p:ph type="sldImg"/>
+          </p:nvPr>
+        </p:nvSpPr>
+        <p:spPr/>
+      </p:sp>
+      <p:sp>
+        <p:nvSpPr>
+          <p:cNvPr id="3" name="Notes Placeholder 2"/>
+          <p:cNvSpPr>
+            <a:spLocks noGrp="1"/>
+          </p:cNvSpPr>
+          <p:nvPr>
+            <p:ph type="body" idx="1"/>
+          </p:nvPr>
+        </p:nvSpPr>
+        <p:spPr/>
+        <p:txBody>
+          <a:bodyPr/>
+          <a:lstStyle/>
+          <a:p>
+            <a:r>
+              <a:rPr lang="en-US" dirty="0"/>
+              <a:t/>
+            </a:r>
+            <a:endParaRPr lang="en-US" dirty="0"/>
+          </a:p>
+        </p:txBody>
+      </p:sp>
+      <p:sp>
+        <p:nvSpPr>
+          <p:cNvPr id="4" name="Slide Number Placeholder 3"/>
+          <p:cNvSpPr>
+            <a:spLocks noGrp="1"/>
+          </p:cNvSpPr>
+          <p:nvPr>
+            <p:ph type="sldNum" sz="quarter" idx="10"/>
+          </p:nvPr>
+        </p:nvSpPr>
+        <p:spPr/>
+        <p:txBody>
+          <a:bodyPr/>
+          <a:lstStyle/>
+          <a:p>
+            <a:fld id="{F7021451-1387-4CA6-816F-3879F97B5CBC}" type="slidenum">
+              <a:rPr lang="en-US"/>
+              <a:t>15</a:t>
+            </a:fld>
+            <a:endParaRPr lang="en-US"/>
+          </a:p>
+        </p:txBody>
+      </p:sp>
+    </p:spTree>
+    <p:extLst>
+      <p:ext uri="{BB962C8B-B14F-4D97-AF65-F5344CB8AC3E}">
+        <p14:creationId xmlns:p14="http://schemas.microsoft.com/office/powerpoint/2010/main" val="1024086991"/>
+      </p:ext>
+    </p:extLst>
+  </p:cSld>
+  <p:clrMapOvr>
+    <a:masterClrMapping/>
+  </p:clrMapOvr>
+</p:notes>
+</file>
+
+<file path=ppt/notesSlides/notesSlide16.xml><?xml version="1.0" encoding="utf-8"?>
+<p:notes xmlns:a="http://schemas.openxmlformats.org/drawingml/2006/main" xmlns:r="http://schemas.openxmlformats.org/officeDocument/2006/relationships" xmlns:p="http://schemas.openxmlformats.org/presentationml/2006/main">
+  <p:cSld>
+    <p:spTree>
+      <p:nvGrpSpPr>
+        <p:cNvPr id="1" name=""/>
+        <p:cNvGrpSpPr/>
+        <p:nvPr/>
+      </p:nvGrpSpPr>
+      <p:grpSpPr>
+        <a:xfrm>
+          <a:off x="0" y="0"/>
+          <a:ext cx="0" cy="0"/>
+          <a:chOff x="0" y="0"/>
+          <a:chExt cx="0" cy="0"/>
+        </a:xfrm>
+      </p:grpSpPr>
+      <p:sp>
+        <p:nvSpPr>
+          <p:cNvPr id="2" name="Slide Image Placeholder 1"/>
+          <p:cNvSpPr>
+            <a:spLocks noGrp="1" noRot="1" noChangeAspect="1"/>
+          </p:cNvSpPr>
+          <p:nvPr>
+            <p:ph type="sldImg"/>
+          </p:nvPr>
+        </p:nvSpPr>
+        <p:spPr/>
+      </p:sp>
+      <p:sp>
+        <p:nvSpPr>
+          <p:cNvPr id="3" name="Notes Placeholder 2"/>
+          <p:cNvSpPr>
+            <a:spLocks noGrp="1"/>
+          </p:cNvSpPr>
+          <p:nvPr>
+            <p:ph type="body" idx="1"/>
+          </p:nvPr>
+        </p:nvSpPr>
+        <p:spPr/>
+        <p:txBody>
+          <a:bodyPr/>
+          <a:lstStyle/>
+          <a:p>
+            <a:r>
+              <a:rPr lang="en-US" dirty="0"/>
+              <a:t/>
+            </a:r>
+            <a:endParaRPr lang="en-US" dirty="0"/>
+          </a:p>
+        </p:txBody>
+      </p:sp>
+      <p:sp>
+        <p:nvSpPr>
+          <p:cNvPr id="4" name="Slide Number Placeholder 3"/>
+          <p:cNvSpPr>
+            <a:spLocks noGrp="1"/>
+          </p:cNvSpPr>
+          <p:nvPr>
+            <p:ph type="sldNum" sz="quarter" idx="10"/>
+          </p:nvPr>
+        </p:nvSpPr>
+        <p:spPr/>
+        <p:txBody>
+          <a:bodyPr/>
+          <a:lstStyle/>
+          <a:p>
+            <a:fld id="{F7021451-1387-4CA6-816F-3879F97B5CBC}" type="slidenum">
+              <a:rPr lang="en-US"/>
+              <a:t>16</a:t>
+            </a:fld>
+            <a:endParaRPr lang="en-US"/>
+          </a:p>
+        </p:txBody>
+      </p:sp>
+    </p:spTree>
+    <p:extLst>
+      <p:ext uri="{BB962C8B-B14F-4D97-AF65-F5344CB8AC3E}">
+        <p14:creationId xmlns:p14="http://schemas.microsoft.com/office/powerpoint/2010/main" val="1024086991"/>
+      </p:ext>
+    </p:extLst>
+  </p:cSld>
+  <p:clrMapOvr>
+    <a:masterClrMapping/>
+  </p:clrMapOvr>
+</p:notes>
+</file>
+
+<file path=ppt/notesSlides/notesSlide17.xml><?xml version="1.0" encoding="utf-8"?>
+<p:notes xmlns:a="http://schemas.openxmlformats.org/drawingml/2006/main" xmlns:r="http://schemas.openxmlformats.org/officeDocument/2006/relationships" xmlns:p="http://schemas.openxmlformats.org/presentationml/2006/main">
+  <p:cSld>
+    <p:spTree>
+      <p:nvGrpSpPr>
+        <p:cNvPr id="1" name=""/>
+        <p:cNvGrpSpPr/>
+        <p:nvPr/>
+      </p:nvGrpSpPr>
+      <p:grpSpPr>
+        <a:xfrm>
+          <a:off x="0" y="0"/>
+          <a:ext cx="0" cy="0"/>
+          <a:chOff x="0" y="0"/>
+          <a:chExt cx="0" cy="0"/>
+        </a:xfrm>
+      </p:grpSpPr>
+      <p:sp>
+        <p:nvSpPr>
+          <p:cNvPr id="2" name="Slide Image Placeholder 1"/>
+          <p:cNvSpPr>
+            <a:spLocks noGrp="1" noRot="1" noChangeAspect="1"/>
+          </p:cNvSpPr>
+          <p:nvPr>
+            <p:ph type="sldImg"/>
+          </p:nvPr>
+        </p:nvSpPr>
+        <p:spPr/>
+      </p:sp>
+      <p:sp>
+        <p:nvSpPr>
+          <p:cNvPr id="3" name="Notes Placeholder 2"/>
+          <p:cNvSpPr>
+            <a:spLocks noGrp="1"/>
+          </p:cNvSpPr>
+          <p:nvPr>
+            <p:ph type="body" idx="1"/>
+          </p:nvPr>
+        </p:nvSpPr>
+        <p:spPr/>
+        <p:txBody>
+          <a:bodyPr/>
+          <a:lstStyle/>
+          <a:p>
+            <a:r>
+              <a:rPr lang="en-US" dirty="0"/>
+              <a:t/>
+            </a:r>
+            <a:endParaRPr lang="en-US" dirty="0"/>
+          </a:p>
+        </p:txBody>
+      </p:sp>
+      <p:sp>
+        <p:nvSpPr>
+          <p:cNvPr id="4" name="Slide Number Placeholder 3"/>
+          <p:cNvSpPr>
+            <a:spLocks noGrp="1"/>
+          </p:cNvSpPr>
+          <p:nvPr>
+            <p:ph type="sldNum" sz="quarter" idx="10"/>
+          </p:nvPr>
+        </p:nvSpPr>
+        <p:spPr/>
+        <p:txBody>
+          <a:bodyPr/>
+          <a:lstStyle/>
+          <a:p>
+            <a:fld id="{F7021451-1387-4CA6-816F-3879F97B5CBC}" type="slidenum">
+              <a:rPr lang="en-US"/>
+              <a:t>17</a:t>
+            </a:fld>
+            <a:endParaRPr lang="en-US"/>
+          </a:p>
+        </p:txBody>
+      </p:sp>
+    </p:spTree>
+    <p:extLst>
+      <p:ext uri="{BB962C8B-B14F-4D97-AF65-F5344CB8AC3E}">
+        <p14:creationId xmlns:p14="http://schemas.microsoft.com/office/powerpoint/2010/main" val="1024086991"/>
+      </p:ext>
+    </p:extLst>
+  </p:cSld>
+  <p:clrMapOvr>
+    <a:masterClrMapping/>
+  </p:clrMapOvr>
+</p:notes>
+</file>
+
+<file path=ppt/notesSlides/notesSlide18.xml><?xml version="1.0" encoding="utf-8"?>
+<p:notes xmlns:a="http://schemas.openxmlformats.org/drawingml/2006/main" xmlns:r="http://schemas.openxmlformats.org/officeDocument/2006/relationships" xmlns:p="http://schemas.openxmlformats.org/presentationml/2006/main">
+  <p:cSld>
+    <p:spTree>
+      <p:nvGrpSpPr>
+        <p:cNvPr id="1" name=""/>
+        <p:cNvGrpSpPr/>
+        <p:nvPr/>
+      </p:nvGrpSpPr>
+      <p:grpSpPr>
+        <a:xfrm>
+          <a:off x="0" y="0"/>
+          <a:ext cx="0" cy="0"/>
+          <a:chOff x="0" y="0"/>
+          <a:chExt cx="0" cy="0"/>
+        </a:xfrm>
+      </p:grpSpPr>
+      <p:sp>
+        <p:nvSpPr>
+          <p:cNvPr id="2" name="Slide Image Placeholder 1"/>
+          <p:cNvSpPr>
+            <a:spLocks noGrp="1" noRot="1" noChangeAspect="1"/>
+          </p:cNvSpPr>
+          <p:nvPr>
+            <p:ph type="sldImg"/>
+          </p:nvPr>
+        </p:nvSpPr>
+        <p:spPr/>
+      </p:sp>
+      <p:sp>
+        <p:nvSpPr>
+          <p:cNvPr id="3" name="Notes Placeholder 2"/>
+          <p:cNvSpPr>
+            <a:spLocks noGrp="1"/>
+          </p:cNvSpPr>
+          <p:nvPr>
+            <p:ph type="body" idx="1"/>
+          </p:nvPr>
+        </p:nvSpPr>
+        <p:spPr/>
+        <p:txBody>
+          <a:bodyPr/>
+          <a:lstStyle/>
+          <a:p>
+            <a:r>
+              <a:rPr lang="en-US" dirty="0"/>
+              <a:t/>
+            </a:r>
+            <a:endParaRPr lang="en-US" dirty="0"/>
+          </a:p>
+        </p:txBody>
+      </p:sp>
+      <p:sp>
+        <p:nvSpPr>
+          <p:cNvPr id="4" name="Slide Number Placeholder 3"/>
+          <p:cNvSpPr>
+            <a:spLocks noGrp="1"/>
+          </p:cNvSpPr>
+          <p:nvPr>
+            <p:ph type="sldNum" sz="quarter" idx="10"/>
+          </p:nvPr>
+        </p:nvSpPr>
+        <p:spPr/>
+        <p:txBody>
+          <a:bodyPr/>
+          <a:lstStyle/>
+          <a:p>
+            <a:fld id="{F7021451-1387-4CA6-816F-3879F97B5CBC}" type="slidenum">
+              <a:rPr lang="en-US"/>
+              <a:t>18</a:t>
             </a:fld>
             <a:endParaRPr lang="en-US"/>
           </a:p>
@@ -2054,102 +2588,6 @@
         </p:nvSpPr>
         <p:spPr>
           <a:xfrm>
-            <a:off x="406301" y="1223963"/>
-            <a:ext cx="8498026" cy="274290"/>
-          </a:xfrm>
-          <a:prstGeom prst="rect">
-            <a:avLst/>
-          </a:prstGeom>
-          <a:noFill/>
-          <a:ln/>
-        </p:spPr>
-        <p:txBody>
-          <a:bodyPr wrap="square" lIns="0" tIns="0" rIns="0" bIns="0" rtlCol="0" anchor="t"/>
-          <a:lstStyle/>
-          <a:p>
-            <a:pPr algn="l" indent="0" marL="0">
-              <a:lnSpc>
-                <a:spcPts val="2160"/>
-              </a:lnSpc>
-              <a:spcBef>
-                <a:spcPts val="600"/>
-              </a:spcBef>
-              <a:spcAft>
-                <a:spcPts val="800"/>
-              </a:spcAft>
-              <a:buNone/>
-            </a:pPr>
-            <a:r>
-              <a:rPr lang="en-US" sz="1800" b="1" dirty="0">
-                <a:solidFill>
-                  <a:srgbClr val="FE4447"/>
-                </a:solidFill>
-                <a:latin typeface="Georgia" pitchFamily="34" charset="0"/>
-                <a:ea typeface="Georgia" pitchFamily="34" charset="-122"/>
-                <a:cs typeface="Georgia" pitchFamily="34" charset="-120"/>
-              </a:rPr>
-              <a:t>Learning objective</a:t>
-            </a:r>
-            <a:endParaRPr lang="en-US" sz="1800" dirty="0"/>
-          </a:p>
-        </p:txBody>
-      </p:sp>
-      <p:sp>
-        <p:nvSpPr>
-          <p:cNvPr id="6" name="Text 4"/>
-          <p:cNvSpPr/>
-          <p:nvPr/>
-        </p:nvSpPr>
-        <p:spPr>
-          <a:xfrm>
-            <a:off x="406301" y="1637854"/>
-            <a:ext cx="8498026" cy="426541"/>
-          </a:xfrm>
-          <a:prstGeom prst="rect">
-            <a:avLst/>
-          </a:prstGeom>
-          <a:noFill/>
-          <a:ln/>
-        </p:spPr>
-        <p:txBody>
-          <a:bodyPr wrap="square" lIns="0" tIns="0" rIns="0" bIns="0" rtlCol="0" anchor="t"/>
-          <a:lstStyle/>
-          <a:p>
-            <a:pPr algn="l" indent="0" marL="0">
-              <a:lnSpc>
-                <a:spcPts val="1680"/>
-              </a:lnSpc>
-              <a:spcBef>
-                <a:spcPts val="300"/>
-              </a:spcBef>
-              <a:spcAft>
-                <a:spcPts val="300"/>
-              </a:spcAft>
-              <a:buNone/>
-            </a:pPr>
-            <a:r>
-              <a:rPr lang="en-US" sz="1200" dirty="0">
-                <a:solidFill>
-                  <a:srgbClr val="1C2833"/>
-                </a:solidFill>
-                <a:latin typeface="Arial" pitchFamily="34" charset="0"/>
-                <a:ea typeface="Arial" pitchFamily="34" charset="-122"/>
-                <a:cs typeface="Arial" pitchFamily="34" charset="-120"/>
-              </a:rPr>
-              <a:t>Students name the four Vedas, distinguish the four textual layers within each Veda, and identify what counts as "Vedic intellectual contribution" beyond ritual.</a:t>
-            </a:r>
-            <a:endParaRPr lang="en-US" sz="1200" dirty="0"/>
-          </a:p>
-        </p:txBody>
-      </p:sp>
-      <p:sp>
-        <p:nvSpPr>
-          <p:cNvPr id="7" name="Text 5"/>
-          <p:cNvSpPr/>
-          <p:nvPr/>
-        </p:nvSpPr>
-        <p:spPr>
-          <a:xfrm>
             <a:off x="406301" y="4434929"/>
             <a:ext cx="8498026" cy="213271"/>
           </a:xfrm>
@@ -2294,7 +2732,7 @@
                 <a:ea typeface="Georgia" pitchFamily="34" charset="-122"/>
                 <a:cs typeface="Georgia" pitchFamily="34" charset="-120"/>
               </a:rPr>
-              <a:t>Differentiation</a:t>
+              <a:t>Core (20 min) (cont.)</a:t>
             </a:r>
             <a:endParaRPr lang="en-US" sz="1800" dirty="0"/>
           </a:p>
@@ -2309,7 +2747,7 @@
         <p:spPr>
           <a:xfrm>
             <a:off x="634901" y="883593"/>
-            <a:ext cx="8102798" cy="525661"/>
+            <a:ext cx="8102798" cy="281880"/>
           </a:xfrm>
           <a:prstGeom prst="rect">
             <a:avLst/>
@@ -2340,19 +2778,45 @@
                 <a:ea typeface="Arial" pitchFamily="34" charset="-122"/>
                 <a:cs typeface="Arial" pitchFamily="34" charset="-120"/>
               </a:rPr>
-              <a:t>Tier up:</a:t>
-            </a:r>
-            <a:pPr algn="l" indent="0" marL="0">
+              <a:t>The intellectual contributions (write on board):</a:t>
+            </a:r>
+            <a:endParaRPr lang="en-US" sz="1200" dirty="0"/>
+          </a:p>
+        </p:txBody>
+      </p:sp>
+      <p:sp>
+        <p:nvSpPr>
+          <p:cNvPr id="5" name="Text 3"/>
+          <p:cNvSpPr/>
+          <p:nvPr/>
+        </p:nvSpPr>
+        <p:spPr>
+          <a:xfrm>
+            <a:off x="634901" y="1266974"/>
+            <a:ext cx="8102798" cy="1218902"/>
+          </a:xfrm>
+          <a:prstGeom prst="rect">
+            <a:avLst/>
+          </a:prstGeom>
+          <a:noFill/>
+          <a:ln/>
+        </p:spPr>
+        <p:txBody>
+          <a:bodyPr wrap="square" lIns="0" tIns="0" rIns="0" bIns="0" rtlCol="0" anchor="t"/>
+          <a:lstStyle/>
+          <a:p>
+            <a:pPr algn="l" marL="342900" indent="-342900">
               <a:lnSpc>
                 <a:spcPts val="1620"/>
               </a:lnSpc>
               <a:spcAft>
                 <a:spcPts val="300"/>
               </a:spcAft>
-              <a:buNone/>
-            </a:pPr>
-            <a:r>
-              <a:rPr lang="en-US" sz="1200" dirty="0">
+              <a:buSzPct val="100000"/>
+              <a:buChar char="•"/>
+            </a:pPr>
+            <a:r>
+              <a:rPr lang="en-US" sz="1200" b="1" dirty="0">
                 <a:solidFill>
                   <a:srgbClr val="1C2833"/>
                 </a:solidFill>
@@ -2360,23 +2824,19 @@
                 <a:ea typeface="Arial" pitchFamily="34" charset="-122"/>
                 <a:cs typeface="Arial" pitchFamily="34" charset="-120"/>
               </a:rPr>
-              <a:t> Read the Īśa Upaniṣad in translation (it's 18 verses; the shortest principal Upaniṣad).</a:t>
-            </a:r>
-            <a:endParaRPr lang="en-US" sz="1200" dirty="0"/>
-          </a:p>
-          <a:p>
-            <a:pPr algn="l" marL="342900" indent="-342900">
+              <a:t>Sanskrit phonetics &amp; grammar</a:t>
+            </a:r>
+            <a:pPr algn="l" indent="0" marL="0">
               <a:lnSpc>
                 <a:spcPts val="1620"/>
               </a:lnSpc>
               <a:spcAft>
                 <a:spcPts val="300"/>
               </a:spcAft>
-              <a:buSzPct val="100000"/>
-              <a:buChar char="•"/>
-            </a:pPr>
-            <a:r>
-              <a:rPr lang="en-US" sz="1200" b="1" dirty="0">
+              <a:buNone/>
+            </a:pPr>
+            <a:r>
+              <a:rPr lang="en-US" sz="1200" dirty="0">
                 <a:solidFill>
                   <a:srgbClr val="1C2833"/>
                 </a:solidFill>
@@ -2384,19 +2844,23 @@
                 <a:ea typeface="Arial" pitchFamily="34" charset="-122"/>
                 <a:cs typeface="Arial" pitchFamily="34" charset="-120"/>
               </a:rPr>
-              <a:t>Tier down:</a:t>
-            </a:r>
-            <a:pPr algn="l" indent="0" marL="0">
+              <a:t> — the Vedas demanded precise oral transmission, generating sophisticated linguistic analysis (peaking in Pāṇini, ~4th c. BCE).</a:t>
+            </a:r>
+            <a:endParaRPr lang="en-US" sz="1200" dirty="0"/>
+          </a:p>
+          <a:p>
+            <a:pPr algn="l" marL="342900" indent="-342900">
               <a:lnSpc>
                 <a:spcPts val="1620"/>
               </a:lnSpc>
               <a:spcAft>
                 <a:spcPts val="300"/>
               </a:spcAft>
-              <a:buNone/>
-            </a:pPr>
-            <a:r>
-              <a:rPr lang="en-US" sz="1200" dirty="0">
+              <a:buSzPct val="100000"/>
+              <a:buChar char="•"/>
+            </a:pPr>
+            <a:r>
+              <a:rPr lang="en-US" sz="1200" b="1" dirty="0">
                 <a:solidFill>
                   <a:srgbClr val="1C2833"/>
                 </a:solidFill>
@@ -2404,15 +2868,123 @@
                 <a:ea typeface="Arial" pitchFamily="34" charset="-122"/>
                 <a:cs typeface="Arial" pitchFamily="34" charset="-120"/>
               </a:rPr>
-              <a:t> Just remember the four Vedas + the four layers.</a:t>
+              <a:t>Early astronomy</a:t>
+            </a:r>
+            <a:pPr algn="l" indent="0" marL="0">
+              <a:lnSpc>
+                <a:spcPts val="1620"/>
+              </a:lnSpc>
+              <a:spcAft>
+                <a:spcPts val="300"/>
+              </a:spcAft>
+              <a:buNone/>
+            </a:pPr>
+            <a:r>
+              <a:rPr lang="en-US" sz="1200" dirty="0">
+                <a:solidFill>
+                  <a:srgbClr val="1C2833"/>
+                </a:solidFill>
+                <a:latin typeface="Arial" pitchFamily="34" charset="0"/>
+                <a:ea typeface="Arial" pitchFamily="34" charset="-122"/>
+                <a:cs typeface="Arial" pitchFamily="34" charset="-120"/>
+              </a:rPr>
+              <a:t> — calendar calculation embedded in ritual texts.</a:t>
             </a:r>
             <a:endParaRPr lang="en-US" sz="1200" dirty="0"/>
           </a:p>
-        </p:txBody>
-      </p:sp>
-      <p:sp>
-        <p:nvSpPr>
-          <p:cNvPr id="5" name="Text 3"/>
+          <a:p>
+            <a:pPr algn="l" marL="342900" indent="-342900">
+              <a:lnSpc>
+                <a:spcPts val="1620"/>
+              </a:lnSpc>
+              <a:spcAft>
+                <a:spcPts val="300"/>
+              </a:spcAft>
+              <a:buSzPct val="100000"/>
+              <a:buChar char="•"/>
+            </a:pPr>
+            <a:r>
+              <a:rPr lang="en-US" sz="1200" b="1" dirty="0">
+                <a:solidFill>
+                  <a:srgbClr val="1C2833"/>
+                </a:solidFill>
+                <a:latin typeface="Arial" pitchFamily="34" charset="0"/>
+                <a:ea typeface="Arial" pitchFamily="34" charset="-122"/>
+                <a:cs typeface="Arial" pitchFamily="34" charset="-120"/>
+              </a:rPr>
+              <a:t>Atharva Veda medicine</a:t>
+            </a:r>
+            <a:pPr algn="l" indent="0" marL="0">
+              <a:lnSpc>
+                <a:spcPts val="1620"/>
+              </a:lnSpc>
+              <a:spcAft>
+                <a:spcPts val="300"/>
+              </a:spcAft>
+              <a:buNone/>
+            </a:pPr>
+            <a:r>
+              <a:rPr lang="en-US" sz="1200" dirty="0">
+                <a:solidFill>
+                  <a:srgbClr val="1C2833"/>
+                </a:solidFill>
+                <a:latin typeface="Arial" pitchFamily="34" charset="0"/>
+                <a:ea typeface="Arial" pitchFamily="34" charset="-122"/>
+                <a:cs typeface="Arial" pitchFamily="34" charset="-120"/>
+              </a:rPr>
+              <a:t> — the earliest documented Indian medical material; Ayurveda's roots.</a:t>
+            </a:r>
+            <a:endParaRPr lang="en-US" sz="1200" dirty="0"/>
+          </a:p>
+          <a:p>
+            <a:pPr algn="l" marL="342900" indent="-342900">
+              <a:lnSpc>
+                <a:spcPts val="1620"/>
+              </a:lnSpc>
+              <a:spcAft>
+                <a:spcPts val="300"/>
+              </a:spcAft>
+              <a:buSzPct val="100000"/>
+              <a:buChar char="•"/>
+            </a:pPr>
+            <a:r>
+              <a:rPr lang="en-US" sz="1200" b="1" dirty="0">
+                <a:solidFill>
+                  <a:srgbClr val="1C2833"/>
+                </a:solidFill>
+                <a:latin typeface="Arial" pitchFamily="34" charset="0"/>
+                <a:ea typeface="Arial" pitchFamily="34" charset="-122"/>
+                <a:cs typeface="Arial" pitchFamily="34" charset="-120"/>
+              </a:rPr>
+              <a:t>Upanishadic philosophy</a:t>
+            </a:r>
+            <a:pPr algn="l" indent="0" marL="0">
+              <a:lnSpc>
+                <a:spcPts val="1620"/>
+              </a:lnSpc>
+              <a:spcAft>
+                <a:spcPts val="300"/>
+              </a:spcAft>
+              <a:buNone/>
+            </a:pPr>
+            <a:r>
+              <a:rPr lang="en-US" sz="1200" dirty="0">
+                <a:solidFill>
+                  <a:srgbClr val="1C2833"/>
+                </a:solidFill>
+                <a:latin typeface="Arial" pitchFamily="34" charset="0"/>
+                <a:ea typeface="Arial" pitchFamily="34" charset="-122"/>
+                <a:cs typeface="Arial" pitchFamily="34" charset="-120"/>
+              </a:rPr>
+              <a:t> — abstract metaphysical inquiry (later picked up by Sāṅkhya, Vedānta, etc.).</a:t>
+            </a:r>
+            <a:endParaRPr lang="en-US" sz="1200" dirty="0"/>
+          </a:p>
+        </p:txBody>
+      </p:sp>
+      <p:sp>
+        <p:nvSpPr>
+          <p:cNvPr id="6" name="Text 4"/>
           <p:cNvSpPr/>
           <p:nvPr/>
         </p:nvSpPr>
@@ -2562,7 +3134,7 @@
                 <a:ea typeface="Georgia" pitchFamily="34" charset="-122"/>
                 <a:cs typeface="Georgia" pitchFamily="34" charset="-120"/>
               </a:rPr>
-              <a:t>Teacher notes</a:t>
+              <a:t>Core (20 min) (cont.)</a:t>
             </a:r>
             <a:endParaRPr lang="en-US" sz="1800" dirty="0"/>
           </a:p>
@@ -2576,8 +3148,8 @@
         </p:nvSpPr>
         <p:spPr>
           <a:xfrm>
-            <a:off x="406301" y="870942"/>
-            <a:ext cx="8498026" cy="639812"/>
+            <a:off x="634901" y="883593"/>
+            <a:ext cx="8102798" cy="281880"/>
           </a:xfrm>
           <a:prstGeom prst="rect">
             <a:avLst/>
@@ -2589,20 +3161,18 @@
           <a:bodyPr wrap="square" lIns="0" tIns="0" rIns="0" bIns="0" rtlCol="0" anchor="t"/>
           <a:lstStyle/>
           <a:p>
-            <a:pPr algn="l" indent="0" marL="0">
-              <a:lnSpc>
-                <a:spcPts val="1680"/>
-              </a:lnSpc>
-              <a:spcBef>
-                <a:spcPts val="300"/>
-              </a:spcBef>
-              <a:spcAft>
-                <a:spcPts val="300"/>
-              </a:spcAft>
-              <a:buNone/>
-            </a:pPr>
-            <a:r>
-              <a:rPr lang="en-US" sz="1200" dirty="0">
+            <a:pPr algn="l" marL="342900" indent="-342900">
+              <a:lnSpc>
+                <a:spcPts val="1620"/>
+              </a:lnSpc>
+              <a:spcAft>
+                <a:spcPts val="300"/>
+              </a:spcAft>
+              <a:buSzPct val="100000"/>
+              <a:buChar char="•"/>
+            </a:pPr>
+            <a:r>
+              <a:rPr lang="en-US" sz="1200" b="1" dirty="0">
                 <a:solidFill>
                   <a:srgbClr val="1C2833"/>
                 </a:solidFill>
@@ -2610,7 +3180,67 @@
                 <a:ea typeface="Arial" pitchFamily="34" charset="-122"/>
                 <a:cs typeface="Arial" pitchFamily="34" charset="-120"/>
               </a:rPr>
-              <a:t>– The dating "~1500–1200 BCE" for the Ṛg Veda is the mainstream scholarly view (Indo-European migration model). Some Indian scholars argue for earlier dates. Acknowledge both; this isn't the module to resolve the debate. – The four-Veda framing is itself a classification. Some Vedic texts don't fit cleanly. The grid is a useful first map, not the final word.</a:t>
+              <a:t>Read aloud:</a:t>
+            </a:r>
+            <a:pPr algn="l" indent="0" marL="0">
+              <a:lnSpc>
+                <a:spcPts val="1620"/>
+              </a:lnSpc>
+              <a:spcAft>
+                <a:spcPts val="300"/>
+              </a:spcAft>
+              <a:buNone/>
+            </a:pPr>
+            <a:r>
+              <a:rPr lang="en-US" sz="1200" dirty="0">
+                <a:solidFill>
+                  <a:srgbClr val="1C2833"/>
+                </a:solidFill>
+                <a:latin typeface="Arial" pitchFamily="34" charset="0"/>
+                <a:ea typeface="Arial" pitchFamily="34" charset="-122"/>
+                <a:cs typeface="Arial" pitchFamily="34" charset="-120"/>
+              </a:rPr>
+              <a:t> opening of </a:t>
+            </a:r>
+            <a:pPr algn="l" indent="0" marL="0">
+              <a:lnSpc>
+                <a:spcPts val="1620"/>
+              </a:lnSpc>
+              <a:spcAft>
+                <a:spcPts val="300"/>
+              </a:spcAft>
+              <a:buNone/>
+            </a:pPr>
+            <a:r>
+              <a:rPr lang="en-US" sz="1200" i="1" dirty="0">
+                <a:solidFill>
+                  <a:srgbClr val="1C2833"/>
+                </a:solidFill>
+                <a:latin typeface="Arial" pitchFamily="34" charset="0"/>
+                <a:ea typeface="Arial" pitchFamily="34" charset="-122"/>
+                <a:cs typeface="Arial" pitchFamily="34" charset="-120"/>
+              </a:rPr>
+              <a:t>Ṛg Veda 1.1</a:t>
+            </a:r>
+            <a:pPr algn="l" indent="0" marL="0">
+              <a:lnSpc>
+                <a:spcPts val="1620"/>
+              </a:lnSpc>
+              <a:spcAft>
+                <a:spcPts val="300"/>
+              </a:spcAft>
+              <a:buNone/>
+            </a:pPr>
+            <a:r>
+              <a:rPr lang="en-US" sz="1200" dirty="0">
+                <a:solidFill>
+                  <a:srgbClr val="1C2833"/>
+                </a:solidFill>
+                <a:latin typeface="Arial" pitchFamily="34" charset="0"/>
+                <a:ea typeface="Arial" pitchFamily="34" charset="-122"/>
+                <a:cs typeface="Arial" pitchFamily="34" charset="-120"/>
+              </a:rPr>
+              <a:t> (the Agni hymn) — 4 lines in Sanskrit + English.</a:t>
             </a:r>
             <a:endParaRPr lang="en-US" sz="1200" dirty="0"/>
           </a:p>
@@ -2619,6 +3249,52 @@
       <p:sp>
         <p:nvSpPr>
           <p:cNvPr id="5" name="Text 3"/>
+          <p:cNvSpPr/>
+          <p:nvPr/>
+        </p:nvSpPr>
+        <p:spPr>
+          <a:xfrm>
+            <a:off x="634901" y="1266974"/>
+            <a:ext cx="8102798" cy="281880"/>
+          </a:xfrm>
+          <a:prstGeom prst="rect">
+            <a:avLst/>
+          </a:prstGeom>
+          <a:noFill/>
+          <a:ln/>
+        </p:spPr>
+        <p:txBody>
+          <a:bodyPr wrap="square" lIns="0" tIns="0" rIns="0" bIns="0" rtlCol="0" anchor="t"/>
+          <a:lstStyle/>
+          <a:p>
+            <a:pPr algn="l" marL="342900" indent="-342900">
+              <a:lnSpc>
+                <a:spcPts val="1620"/>
+              </a:lnSpc>
+              <a:spcAft>
+                <a:spcPts val="300"/>
+              </a:spcAft>
+              <a:buSzPct val="100000"/>
+              <a:buChar char="•"/>
+            </a:pPr>
+            <a:r>
+              <a:rPr lang="en-US" sz="1200" dirty="0">
+                <a:solidFill>
+                  <a:srgbClr val="1C2833"/>
+                </a:solidFill>
+                <a:latin typeface="Arial" pitchFamily="34" charset="0"/>
+                <a:ea typeface="Arial" pitchFamily="34" charset="-122"/>
+                <a:cs typeface="Arial" pitchFamily="34" charset="-120"/>
+              </a:rPr>
+              <a:t>Note: hymn form, ritual purpose, also a window into 1500 BCE worldview.</a:t>
+            </a:r>
+            <a:endParaRPr lang="en-US" sz="1200" dirty="0"/>
+          </a:p>
+        </p:txBody>
+      </p:sp>
+      <p:sp>
+        <p:nvSpPr>
+          <p:cNvPr id="6" name="Text 4"/>
           <p:cNvSpPr/>
           <p:nvPr/>
         </p:nvSpPr>
@@ -2768,7 +3444,7 @@
                 <a:ea typeface="Georgia" pitchFamily="34" charset="-122"/>
                 <a:cs typeface="Georgia" pitchFamily="34" charset="-120"/>
               </a:rPr>
-              <a:t>Citation(s) used</a:t>
+              <a:t>Activity (15 min) — Layer mapping</a:t>
             </a:r>
             <a:endParaRPr lang="en-US" sz="1800" dirty="0"/>
           </a:p>
@@ -2782,8 +3458,8 @@
         </p:nvSpPr>
         <p:spPr>
           <a:xfrm>
-            <a:off x="634901" y="883593"/>
-            <a:ext cx="8102798" cy="281880"/>
+            <a:off x="406301" y="870942"/>
+            <a:ext cx="8498026" cy="426541"/>
           </a:xfrm>
           <a:prstGeom prst="rect">
             <a:avLst/>
@@ -2795,15 +3471,17 @@
           <a:bodyPr wrap="square" lIns="0" tIns="0" rIns="0" bIns="0" rtlCol="0" anchor="t"/>
           <a:lstStyle/>
           <a:p>
-            <a:pPr algn="l" marL="342900" indent="-342900">
-              <a:lnSpc>
-                <a:spcPts val="1620"/>
-              </a:lnSpc>
-              <a:spcAft>
-                <a:spcPts val="300"/>
-              </a:spcAft>
-              <a:buSzPct val="100000"/>
-              <a:buChar char="•"/>
+            <a:pPr algn="l" indent="0" marL="0">
+              <a:lnSpc>
+                <a:spcPts val="1680"/>
+              </a:lnSpc>
+              <a:spcBef>
+                <a:spcPts val="300"/>
+              </a:spcBef>
+              <a:spcAft>
+                <a:spcPts val="300"/>
+              </a:spcAft>
+              <a:buNone/>
             </a:pPr>
             <a:r>
               <a:rPr lang="en-US" sz="1200" dirty="0">
@@ -2814,7 +3492,7 @@
                 <a:ea typeface="Arial" pitchFamily="34" charset="-122"/>
                 <a:cs typeface="Arial" pitchFamily="34" charset="-120"/>
               </a:rPr>
-              <a:t>Ṛg Veda 1.1 — Jamison &amp; Brereton (2014) translation.</a:t>
+              <a:t>Students draw their own version of the "4 Vedas × 4 layers" grid in their notebook. For each cell, they write one one-line description.</a:t>
             </a:r>
             <a:endParaRPr lang="en-US" sz="1200" dirty="0"/>
           </a:p>
@@ -2828,8 +3506,8 @@
         </p:nvSpPr>
         <p:spPr>
           <a:xfrm>
-            <a:off x="406301" y="1254323"/>
-            <a:ext cx="8498026" cy="213271"/>
+            <a:off x="406301" y="1373684"/>
+            <a:ext cx="8498026" cy="426541"/>
           </a:xfrm>
           <a:prstGeom prst="rect">
             <a:avLst/>
@@ -2862,7 +3540,30 @@
                 <a:ea typeface="Arial" pitchFamily="34" charset="-122"/>
                 <a:cs typeface="Arial" pitchFamily="34" charset="-120"/>
               </a:rPr>
-              <a:t>– Pollock (2006) on Vedic transmission and linguistic precision.</a:t>
+              <a:t>Then they pick ONE cell and write a 1-sentence answer to: </a:t>
+            </a:r>
+            <a:pPr algn="l" indent="0" marL="0">
+              <a:lnSpc>
+                <a:spcPts val="1680"/>
+              </a:lnSpc>
+              <a:spcBef>
+                <a:spcPts val="300"/>
+              </a:spcBef>
+              <a:spcAft>
+                <a:spcPts val="300"/>
+              </a:spcAft>
+              <a:buNone/>
+            </a:pPr>
+            <a:r>
+              <a:rPr lang="en-US" sz="1200" i="1" dirty="0">
+                <a:solidFill>
+                  <a:srgbClr val="1C2833"/>
+                </a:solidFill>
+                <a:latin typeface="Arial" pitchFamily="34" charset="0"/>
+                <a:ea typeface="Arial" pitchFamily="34" charset="-122"/>
+                <a:cs typeface="Arial" pitchFamily="34" charset="-120"/>
+              </a:rPr>
+              <a:t>"What might someone studying THIS layer be trying to understand?"</a:t>
             </a:r>
             <a:endParaRPr lang="en-US" sz="1200" dirty="0"/>
           </a:p>
@@ -2871,6 +3572,1815 @@
       <p:sp>
         <p:nvSpPr>
           <p:cNvPr id="6" name="Text 4"/>
+          <p:cNvSpPr/>
+          <p:nvPr/>
+        </p:nvSpPr>
+        <p:spPr>
+          <a:xfrm>
+            <a:off x="406301" y="4434929"/>
+            <a:ext cx="8498026" cy="213271"/>
+          </a:xfrm>
+          <a:prstGeom prst="rect">
+            <a:avLst/>
+          </a:prstGeom>
+          <a:noFill/>
+          <a:ln/>
+        </p:spPr>
+        <p:txBody>
+          <a:bodyPr wrap="square" lIns="0" tIns="0" rIns="0" bIns="0" rtlCol="0" anchor="t"/>
+          <a:lstStyle/>
+          <a:p>
+            <a:pPr algn="l" indent="0" marL="0">
+              <a:lnSpc>
+                <a:spcPts val="1680"/>
+              </a:lnSpc>
+              <a:spcBef>
+                <a:spcPts val="300"/>
+              </a:spcBef>
+              <a:spcAft>
+                <a:spcPts val="300"/>
+              </a:spcAft>
+              <a:buNone/>
+            </a:pPr>
+            <a:r>
+              <a:rPr lang="en-US" sz="1200" dirty="0">
+                <a:solidFill>
+                  <a:srgbClr val="1C2833"/>
+                </a:solidFill>
+                <a:latin typeface="Arial" pitchFamily="34" charset="0"/>
+                <a:ea typeface="Arial" pitchFamily="34" charset="-122"/>
+                <a:cs typeface="Arial" pitchFamily="34" charset="-120"/>
+              </a:rPr>
+              <a:t>Middle ·  · IKS Curriculum</a:t>
+            </a:r>
+            <a:endParaRPr lang="en-US" sz="1200" dirty="0"/>
+          </a:p>
+        </p:txBody>
+      </p:sp>
+    </p:spTree>
+  </p:cSld>
+  <p:clrMapOvr>
+    <a:masterClrMapping/>
+  </p:clrMapOvr>
+</p:sld>
+</file>
+
+<file path=ppt/slides/slide13.xml><?xml version="1.0" encoding="utf-8"?>
+<p:sld xmlns:a="http://schemas.openxmlformats.org/drawingml/2006/main" xmlns:r="http://schemas.openxmlformats.org/officeDocument/2006/relationships" xmlns:p="http://schemas.openxmlformats.org/presentationml/2006/main">
+  <p:cSld name="Slide 13">
+    <p:bg>
+      <p:bgPr>
+        <a:solidFill>
+          <a:srgbClr val="FFFFFF"/>
+        </a:solidFill>
+      </p:bgPr>
+    </p:bg>
+    <p:spTree>
+      <p:nvGrpSpPr>
+        <p:cNvPr id="1" name=""/>
+        <p:cNvGrpSpPr/>
+        <p:nvPr/>
+      </p:nvGrpSpPr>
+      <p:grpSpPr>
+        <a:xfrm>
+          <a:off x="0" y="0"/>
+          <a:ext cx="0" cy="0"/>
+          <a:chOff x="0" y="0"/>
+          <a:chExt cx="0" cy="0"/>
+        </a:xfrm>
+      </p:grpSpPr>
+      <p:sp>
+        <p:nvSpPr>
+          <p:cNvPr id="2" name="Text 0"/>
+          <p:cNvSpPr/>
+          <p:nvPr/>
+        </p:nvSpPr>
+        <p:spPr>
+          <a:xfrm>
+            <a:off x="0" y="0"/>
+            <a:ext cx="9144000" cy="101501"/>
+          </a:xfrm>
+          <a:prstGeom prst="rect">
+            <a:avLst/>
+          </a:prstGeom>
+          <a:solidFill>
+            <a:srgbClr val="277884"/>
+          </a:solidFill>
+          <a:ln/>
+        </p:spPr>
+        <p:txBody>
+          <a:bodyPr wrap="square" rtlCol="0" anchor="ctr"/>
+          <a:lstStyle/>
+          <a:p>
+            <a:pPr indent="0" marL="0">
+              <a:buNone/>
+            </a:pPr>
+            <a:endParaRPr lang="en-US" dirty="0"/>
+          </a:p>
+        </p:txBody>
+      </p:sp>
+      <p:sp>
+        <p:nvSpPr>
+          <p:cNvPr id="3" name="Text 1"/>
+          <p:cNvSpPr/>
+          <p:nvPr/>
+        </p:nvSpPr>
+        <p:spPr>
+          <a:xfrm>
+            <a:off x="406301" y="457051"/>
+            <a:ext cx="8498026" cy="274290"/>
+          </a:xfrm>
+          <a:prstGeom prst="rect">
+            <a:avLst/>
+          </a:prstGeom>
+          <a:noFill/>
+          <a:ln/>
+        </p:spPr>
+        <p:txBody>
+          <a:bodyPr wrap="square" lIns="0" tIns="0" rIns="0" bIns="0" rtlCol="0" anchor="t"/>
+          <a:lstStyle/>
+          <a:p>
+            <a:pPr algn="l" indent="0" marL="0">
+              <a:lnSpc>
+                <a:spcPts val="2160"/>
+              </a:lnSpc>
+              <a:spcBef>
+                <a:spcPts val="600"/>
+              </a:spcBef>
+              <a:spcAft>
+                <a:spcPts val="800"/>
+              </a:spcAft>
+              <a:buNone/>
+            </a:pPr>
+            <a:r>
+              <a:rPr lang="en-US" sz="1800" b="1" dirty="0">
+                <a:solidFill>
+                  <a:srgbClr val="FE4447"/>
+                </a:solidFill>
+                <a:latin typeface="Georgia" pitchFamily="34" charset="0"/>
+                <a:ea typeface="Georgia" pitchFamily="34" charset="-122"/>
+                <a:cs typeface="Georgia" pitchFamily="34" charset="-120"/>
+              </a:rPr>
+              <a:t>Wrap-up (5 min)</a:t>
+            </a:r>
+            <a:endParaRPr lang="en-US" sz="1800" dirty="0"/>
+          </a:p>
+        </p:txBody>
+      </p:sp>
+      <p:sp>
+        <p:nvSpPr>
+          <p:cNvPr id="4" name="Text 2"/>
+          <p:cNvSpPr/>
+          <p:nvPr/>
+        </p:nvSpPr>
+        <p:spPr>
+          <a:xfrm>
+            <a:off x="634901" y="883593"/>
+            <a:ext cx="8102798" cy="525661"/>
+          </a:xfrm>
+          <a:prstGeom prst="rect">
+            <a:avLst/>
+          </a:prstGeom>
+          <a:noFill/>
+          <a:ln/>
+        </p:spPr>
+        <p:txBody>
+          <a:bodyPr wrap="square" lIns="0" tIns="0" rIns="0" bIns="0" rtlCol="0" anchor="t"/>
+          <a:lstStyle/>
+          <a:p>
+            <a:pPr algn="l" marL="342900" indent="-342900">
+              <a:lnSpc>
+                <a:spcPts val="1620"/>
+              </a:lnSpc>
+              <a:spcAft>
+                <a:spcPts val="300"/>
+              </a:spcAft>
+              <a:buSzPct val="100000"/>
+              <a:buChar char="•"/>
+            </a:pPr>
+            <a:r>
+              <a:rPr lang="en-US" sz="1200" dirty="0">
+                <a:solidFill>
+                  <a:srgbClr val="1C2833"/>
+                </a:solidFill>
+                <a:latin typeface="Arial" pitchFamily="34" charset="0"/>
+                <a:ea typeface="Arial" pitchFamily="34" charset="-122"/>
+                <a:cs typeface="Arial" pitchFamily="34" charset="-120"/>
+              </a:rPr>
+              <a:t>Quick exit ticket (oral): "Name one Veda and one layer."</a:t>
+            </a:r>
+            <a:endParaRPr lang="en-US" sz="1200" dirty="0"/>
+          </a:p>
+          <a:p>
+            <a:pPr algn="l" marL="342900" indent="-342900">
+              <a:lnSpc>
+                <a:spcPts val="1620"/>
+              </a:lnSpc>
+              <a:spcAft>
+                <a:spcPts val="300"/>
+              </a:spcAft>
+              <a:buSzPct val="100000"/>
+              <a:buChar char="•"/>
+            </a:pPr>
+            <a:r>
+              <a:rPr lang="en-US" sz="1200" dirty="0">
+                <a:solidFill>
+                  <a:srgbClr val="1C2833"/>
+                </a:solidFill>
+                <a:latin typeface="Arial" pitchFamily="34" charset="0"/>
+                <a:ea typeface="Arial" pitchFamily="34" charset="-122"/>
+                <a:cs typeface="Arial" pitchFamily="34" charset="-120"/>
+              </a:rPr>
+              <a:t>Preview Day 3: </a:t>
+            </a:r>
+            <a:pPr algn="l" indent="0" marL="0">
+              <a:lnSpc>
+                <a:spcPts val="1620"/>
+              </a:lnSpc>
+              <a:spcAft>
+                <a:spcPts val="300"/>
+              </a:spcAft>
+              <a:buNone/>
+            </a:pPr>
+            <a:r>
+              <a:rPr lang="en-US" sz="1200" i="1" dirty="0">
+                <a:solidFill>
+                  <a:srgbClr val="1C2833"/>
+                </a:solidFill>
+                <a:latin typeface="Arial" pitchFamily="34" charset="0"/>
+                <a:ea typeface="Arial" pitchFamily="34" charset="-122"/>
+                <a:cs typeface="Arial" pitchFamily="34" charset="-120"/>
+              </a:rPr>
+              <a:t>"Tomorrow — the Vedangas, six auxiliary disciplines that grew up around the Vedas."</a:t>
+            </a:r>
+            <a:endParaRPr lang="en-US" sz="1200" dirty="0"/>
+          </a:p>
+        </p:txBody>
+      </p:sp>
+      <p:sp>
+        <p:nvSpPr>
+          <p:cNvPr id="5" name="Text 3"/>
+          <p:cNvSpPr/>
+          <p:nvPr/>
+        </p:nvSpPr>
+        <p:spPr>
+          <a:xfrm>
+            <a:off x="406301" y="4434929"/>
+            <a:ext cx="8498026" cy="213271"/>
+          </a:xfrm>
+          <a:prstGeom prst="rect">
+            <a:avLst/>
+          </a:prstGeom>
+          <a:noFill/>
+          <a:ln/>
+        </p:spPr>
+        <p:txBody>
+          <a:bodyPr wrap="square" lIns="0" tIns="0" rIns="0" bIns="0" rtlCol="0" anchor="t"/>
+          <a:lstStyle/>
+          <a:p>
+            <a:pPr algn="l" indent="0" marL="0">
+              <a:lnSpc>
+                <a:spcPts val="1680"/>
+              </a:lnSpc>
+              <a:spcBef>
+                <a:spcPts val="300"/>
+              </a:spcBef>
+              <a:spcAft>
+                <a:spcPts val="300"/>
+              </a:spcAft>
+              <a:buNone/>
+            </a:pPr>
+            <a:r>
+              <a:rPr lang="en-US" sz="1200" dirty="0">
+                <a:solidFill>
+                  <a:srgbClr val="1C2833"/>
+                </a:solidFill>
+                <a:latin typeface="Arial" pitchFamily="34" charset="0"/>
+                <a:ea typeface="Arial" pitchFamily="34" charset="-122"/>
+                <a:cs typeface="Arial" pitchFamily="34" charset="-120"/>
+              </a:rPr>
+              <a:t>Middle ·  · IKS Curriculum</a:t>
+            </a:r>
+            <a:endParaRPr lang="en-US" sz="1200" dirty="0"/>
+          </a:p>
+        </p:txBody>
+      </p:sp>
+    </p:spTree>
+  </p:cSld>
+  <p:clrMapOvr>
+    <a:masterClrMapping/>
+  </p:clrMapOvr>
+</p:sld>
+</file>
+
+<file path=ppt/slides/slide14.xml><?xml version="1.0" encoding="utf-8"?>
+<p:sld xmlns:a="http://schemas.openxmlformats.org/drawingml/2006/main" xmlns:r="http://schemas.openxmlformats.org/officeDocument/2006/relationships" xmlns:p="http://schemas.openxmlformats.org/presentationml/2006/main">
+  <p:cSld name="Slide 14">
+    <p:bg>
+      <p:bgPr>
+        <a:solidFill>
+          <a:srgbClr val="FFFFFF"/>
+        </a:solidFill>
+      </p:bgPr>
+    </p:bg>
+    <p:spTree>
+      <p:nvGrpSpPr>
+        <p:cNvPr id="1" name=""/>
+        <p:cNvGrpSpPr/>
+        <p:nvPr/>
+      </p:nvGrpSpPr>
+      <p:grpSpPr>
+        <a:xfrm>
+          <a:off x="0" y="0"/>
+          <a:ext cx="0" cy="0"/>
+          <a:chOff x="0" y="0"/>
+          <a:chExt cx="0" cy="0"/>
+        </a:xfrm>
+      </p:grpSpPr>
+      <p:sp>
+        <p:nvSpPr>
+          <p:cNvPr id="2" name="Text 0"/>
+          <p:cNvSpPr/>
+          <p:nvPr/>
+        </p:nvSpPr>
+        <p:spPr>
+          <a:xfrm>
+            <a:off x="0" y="0"/>
+            <a:ext cx="9144000" cy="101501"/>
+          </a:xfrm>
+          <a:prstGeom prst="rect">
+            <a:avLst/>
+          </a:prstGeom>
+          <a:solidFill>
+            <a:srgbClr val="277884"/>
+          </a:solidFill>
+          <a:ln/>
+        </p:spPr>
+        <p:txBody>
+          <a:bodyPr wrap="square" rtlCol="0" anchor="ctr"/>
+          <a:lstStyle/>
+          <a:p>
+            <a:pPr indent="0" marL="0">
+              <a:buNone/>
+            </a:pPr>
+            <a:endParaRPr lang="en-US" dirty="0"/>
+          </a:p>
+        </p:txBody>
+      </p:sp>
+      <p:sp>
+        <p:nvSpPr>
+          <p:cNvPr id="3" name="Text 1"/>
+          <p:cNvSpPr/>
+          <p:nvPr/>
+        </p:nvSpPr>
+        <p:spPr>
+          <a:xfrm>
+            <a:off x="406301" y="457051"/>
+            <a:ext cx="8498026" cy="274290"/>
+          </a:xfrm>
+          <a:prstGeom prst="rect">
+            <a:avLst/>
+          </a:prstGeom>
+          <a:noFill/>
+          <a:ln/>
+        </p:spPr>
+        <p:txBody>
+          <a:bodyPr wrap="square" lIns="0" tIns="0" rIns="0" bIns="0" rtlCol="0" anchor="t"/>
+          <a:lstStyle/>
+          <a:p>
+            <a:pPr algn="l" indent="0" marL="0">
+              <a:lnSpc>
+                <a:spcPts val="2160"/>
+              </a:lnSpc>
+              <a:spcBef>
+                <a:spcPts val="600"/>
+              </a:spcBef>
+              <a:spcAft>
+                <a:spcPts val="800"/>
+              </a:spcAft>
+              <a:buNone/>
+            </a:pPr>
+            <a:r>
+              <a:rPr lang="en-US" sz="1800" b="1" dirty="0">
+                <a:solidFill>
+                  <a:srgbClr val="FE4447"/>
+                </a:solidFill>
+                <a:latin typeface="Georgia" pitchFamily="34" charset="0"/>
+                <a:ea typeface="Georgia" pitchFamily="34" charset="-122"/>
+                <a:cs typeface="Georgia" pitchFamily="34" charset="-120"/>
+              </a:rPr>
+              <a:t>Student-facing content</a:t>
+            </a:r>
+            <a:endParaRPr lang="en-US" sz="1800" dirty="0"/>
+          </a:p>
+        </p:txBody>
+      </p:sp>
+      <p:sp>
+        <p:nvSpPr>
+          <p:cNvPr id="4" name="Text 2"/>
+          <p:cNvSpPr/>
+          <p:nvPr/>
+        </p:nvSpPr>
+        <p:spPr>
+          <a:xfrm>
+            <a:off x="406301" y="883593"/>
+            <a:ext cx="8331398" cy="2112169"/>
+          </a:xfrm>
+          <a:prstGeom prst="rect">
+            <a:avLst/>
+          </a:prstGeom>
+          <a:solidFill>
+            <a:srgbClr val="F4F8F9"/>
+          </a:solidFill>
+          <a:ln/>
+        </p:spPr>
+        <p:txBody>
+          <a:bodyPr wrap="square" rtlCol="0" anchor="ctr"/>
+          <a:lstStyle/>
+          <a:p>
+            <a:pPr indent="0" marL="0">
+              <a:buNone/>
+            </a:pPr>
+            <a:endParaRPr lang="en-US" dirty="0"/>
+          </a:p>
+        </p:txBody>
+      </p:sp>
+      <p:sp>
+        <p:nvSpPr>
+          <p:cNvPr id="5" name="Shape 3"/>
+          <p:cNvSpPr/>
+          <p:nvPr/>
+        </p:nvSpPr>
+        <p:spPr>
+          <a:xfrm>
+            <a:off x="434876" y="883593"/>
+            <a:ext cx="0" cy="2112169"/>
+          </a:xfrm>
+          <a:prstGeom prst="line">
+            <a:avLst/>
+          </a:prstGeom>
+          <a:noFill/>
+          <a:ln w="57150">
+            <a:solidFill>
+              <a:srgbClr val="FE4447"/>
+            </a:solidFill>
+            <a:prstDash val="solid"/>
+          </a:ln>
+        </p:spPr>
+      </p:sp>
+      <p:sp>
+        <p:nvSpPr>
+          <p:cNvPr id="6" name="Text 4"/>
+          <p:cNvSpPr/>
+          <p:nvPr/>
+        </p:nvSpPr>
+        <p:spPr>
+          <a:xfrm>
+            <a:off x="692051" y="1074093"/>
+            <a:ext cx="7973389" cy="230981"/>
+          </a:xfrm>
+          <a:prstGeom prst="rect">
+            <a:avLst/>
+          </a:prstGeom>
+          <a:noFill/>
+          <a:ln/>
+        </p:spPr>
+        <p:txBody>
+          <a:bodyPr wrap="square" lIns="0" tIns="0" rIns="0" bIns="0" rtlCol="0" anchor="t"/>
+          <a:lstStyle/>
+          <a:p>
+            <a:pPr algn="l" indent="0" marL="0">
+              <a:lnSpc>
+                <a:spcPts val="1820"/>
+              </a:lnSpc>
+              <a:spcBef>
+                <a:spcPts val="300"/>
+              </a:spcBef>
+              <a:spcAft>
+                <a:spcPts val="300"/>
+              </a:spcAft>
+              <a:buNone/>
+            </a:pPr>
+            <a:r>
+              <a:rPr lang="en-US" sz="1300" b="1" i="1" dirty="0">
+                <a:solidFill>
+                  <a:srgbClr val="1C2833"/>
+                </a:solidFill>
+                <a:latin typeface="Georgia" pitchFamily="34" charset="0"/>
+                <a:ea typeface="Georgia" pitchFamily="34" charset="-122"/>
+                <a:cs typeface="Georgia" pitchFamily="34" charset="-120"/>
+              </a:rPr>
+              <a:t>The Four Vedas</a:t>
+            </a:r>
+            <a:endParaRPr lang="en-US" sz="1300" dirty="0"/>
+          </a:p>
+        </p:txBody>
+      </p:sp>
+      <p:sp>
+        <p:nvSpPr>
+          <p:cNvPr id="7" name="Text 5"/>
+          <p:cNvSpPr/>
+          <p:nvPr/>
+        </p:nvSpPr>
+        <p:spPr>
+          <a:xfrm>
+            <a:off x="692051" y="1343174"/>
+            <a:ext cx="7973389" cy="461963"/>
+          </a:xfrm>
+          <a:prstGeom prst="rect">
+            <a:avLst/>
+          </a:prstGeom>
+          <a:noFill/>
+          <a:ln/>
+        </p:spPr>
+        <p:txBody>
+          <a:bodyPr wrap="square" lIns="0" tIns="0" rIns="0" bIns="0" rtlCol="0" anchor="t"/>
+          <a:lstStyle/>
+          <a:p>
+            <a:pPr algn="l" indent="0" marL="0">
+              <a:lnSpc>
+                <a:spcPts val="1820"/>
+              </a:lnSpc>
+              <a:spcBef>
+                <a:spcPts val="300"/>
+              </a:spcBef>
+              <a:spcAft>
+                <a:spcPts val="300"/>
+              </a:spcAft>
+              <a:buNone/>
+            </a:pPr>
+            <a:r>
+              <a:rPr lang="en-US" sz="1300" i="1" dirty="0">
+                <a:solidFill>
+                  <a:srgbClr val="1C2833"/>
+                </a:solidFill>
+                <a:latin typeface="Georgia" pitchFamily="34" charset="0"/>
+                <a:ea typeface="Georgia" pitchFamily="34" charset="-122"/>
+                <a:cs typeface="Georgia" pitchFamily="34" charset="-120"/>
+              </a:rPr>
+              <a:t>| Veda | What it contains | |------|------------------| | Ṛg | Hymns of praise (~1500–1200 BCE) | | Yajur | Ritual formulas | | Sāma | Chants and melody | | Atharva | Spells, early medicine |</a:t>
+            </a:r>
+            <a:endParaRPr lang="en-US" sz="1300" dirty="0"/>
+          </a:p>
+        </p:txBody>
+      </p:sp>
+      <p:sp>
+        <p:nvSpPr>
+          <p:cNvPr id="8" name="Text 6"/>
+          <p:cNvSpPr/>
+          <p:nvPr/>
+        </p:nvSpPr>
+        <p:spPr>
+          <a:xfrm>
+            <a:off x="692051" y="1843236"/>
+            <a:ext cx="7973389" cy="461963"/>
+          </a:xfrm>
+          <a:prstGeom prst="rect">
+            <a:avLst/>
+          </a:prstGeom>
+          <a:noFill/>
+          <a:ln/>
+        </p:spPr>
+        <p:txBody>
+          <a:bodyPr wrap="square" lIns="0" tIns="0" rIns="0" bIns="0" rtlCol="0" anchor="t"/>
+          <a:lstStyle/>
+          <a:p>
+            <a:pPr algn="l" indent="0" marL="0">
+              <a:lnSpc>
+                <a:spcPts val="1820"/>
+              </a:lnSpc>
+              <a:spcBef>
+                <a:spcPts val="300"/>
+              </a:spcBef>
+              <a:spcAft>
+                <a:spcPts val="300"/>
+              </a:spcAft>
+              <a:buNone/>
+            </a:pPr>
+            <a:r>
+              <a:rPr lang="en-US" sz="1300" dirty="0">
+                <a:solidFill>
+                  <a:srgbClr val="1C2833"/>
+                </a:solidFill>
+                <a:latin typeface="Georgia" pitchFamily="34" charset="0"/>
+                <a:ea typeface="Georgia" pitchFamily="34" charset="-122"/>
+                <a:cs typeface="Georgia" pitchFamily="34" charset="-120"/>
+              </a:rPr>
+              <a:t>Each Veda has FOUR layers: </a:t>
+            </a:r>
+            <a:pPr algn="l" indent="0" marL="0">
+              <a:lnSpc>
+                <a:spcPts val="1820"/>
+              </a:lnSpc>
+              <a:spcBef>
+                <a:spcPts val="300"/>
+              </a:spcBef>
+              <a:spcAft>
+                <a:spcPts val="300"/>
+              </a:spcAft>
+              <a:buNone/>
+            </a:pPr>
+            <a:r>
+              <a:rPr lang="en-US" sz="1300" b="1" i="1" dirty="0">
+                <a:solidFill>
+                  <a:srgbClr val="1C2833"/>
+                </a:solidFill>
+                <a:latin typeface="Georgia" pitchFamily="34" charset="0"/>
+                <a:ea typeface="Georgia" pitchFamily="34" charset="-122"/>
+                <a:cs typeface="Georgia" pitchFamily="34" charset="-120"/>
+              </a:rPr>
+              <a:t>Saṃhitā</a:t>
+            </a:r>
+            <a:pPr algn="l" indent="0" marL="0">
+              <a:lnSpc>
+                <a:spcPts val="1820"/>
+              </a:lnSpc>
+              <a:spcBef>
+                <a:spcPts val="300"/>
+              </a:spcBef>
+              <a:spcAft>
+                <a:spcPts val="300"/>
+              </a:spcAft>
+              <a:buNone/>
+            </a:pPr>
+            <a:r>
+              <a:rPr lang="en-US" sz="1300" dirty="0">
+                <a:solidFill>
+                  <a:srgbClr val="1C2833"/>
+                </a:solidFill>
+                <a:latin typeface="Georgia" pitchFamily="34" charset="0"/>
+                <a:ea typeface="Georgia" pitchFamily="34" charset="-122"/>
+                <a:cs typeface="Georgia" pitchFamily="34" charset="-120"/>
+              </a:rPr>
+              <a:t> (hymns) → </a:t>
+            </a:r>
+            <a:pPr algn="l" indent="0" marL="0">
+              <a:lnSpc>
+                <a:spcPts val="1820"/>
+              </a:lnSpc>
+              <a:spcBef>
+                <a:spcPts val="300"/>
+              </a:spcBef>
+              <a:spcAft>
+                <a:spcPts val="300"/>
+              </a:spcAft>
+              <a:buNone/>
+            </a:pPr>
+            <a:r>
+              <a:rPr lang="en-US" sz="1300" b="1" i="1" dirty="0">
+                <a:solidFill>
+                  <a:srgbClr val="1C2833"/>
+                </a:solidFill>
+                <a:latin typeface="Georgia" pitchFamily="34" charset="0"/>
+                <a:ea typeface="Georgia" pitchFamily="34" charset="-122"/>
+                <a:cs typeface="Georgia" pitchFamily="34" charset="-120"/>
+              </a:rPr>
+              <a:t>Brāhmaṇa</a:t>
+            </a:r>
+            <a:pPr algn="l" indent="0" marL="0">
+              <a:lnSpc>
+                <a:spcPts val="1820"/>
+              </a:lnSpc>
+              <a:spcBef>
+                <a:spcPts val="300"/>
+              </a:spcBef>
+              <a:spcAft>
+                <a:spcPts val="300"/>
+              </a:spcAft>
+              <a:buNone/>
+            </a:pPr>
+            <a:r>
+              <a:rPr lang="en-US" sz="1300" dirty="0">
+                <a:solidFill>
+                  <a:srgbClr val="1C2833"/>
+                </a:solidFill>
+                <a:latin typeface="Georgia" pitchFamily="34" charset="0"/>
+                <a:ea typeface="Georgia" pitchFamily="34" charset="-122"/>
+                <a:cs typeface="Georgia" pitchFamily="34" charset="-120"/>
+              </a:rPr>
+              <a:t> (ritual commentary) → </a:t>
+            </a:r>
+            <a:pPr algn="l" indent="0" marL="0">
+              <a:lnSpc>
+                <a:spcPts val="1820"/>
+              </a:lnSpc>
+              <a:spcBef>
+                <a:spcPts val="300"/>
+              </a:spcBef>
+              <a:spcAft>
+                <a:spcPts val="300"/>
+              </a:spcAft>
+              <a:buNone/>
+            </a:pPr>
+            <a:r>
+              <a:rPr lang="en-US" sz="1300" b="1" i="1" dirty="0">
+                <a:solidFill>
+                  <a:srgbClr val="1C2833"/>
+                </a:solidFill>
+                <a:latin typeface="Georgia" pitchFamily="34" charset="0"/>
+                <a:ea typeface="Georgia" pitchFamily="34" charset="-122"/>
+                <a:cs typeface="Georgia" pitchFamily="34" charset="-120"/>
+              </a:rPr>
+              <a:t>Āraṇyaka</a:t>
+            </a:r>
+            <a:pPr algn="l" indent="0" marL="0">
+              <a:lnSpc>
+                <a:spcPts val="1820"/>
+              </a:lnSpc>
+              <a:spcBef>
+                <a:spcPts val="300"/>
+              </a:spcBef>
+              <a:spcAft>
+                <a:spcPts val="300"/>
+              </a:spcAft>
+              <a:buNone/>
+            </a:pPr>
+            <a:r>
+              <a:rPr lang="en-US" sz="1300" dirty="0">
+                <a:solidFill>
+                  <a:srgbClr val="1C2833"/>
+                </a:solidFill>
+                <a:latin typeface="Georgia" pitchFamily="34" charset="0"/>
+                <a:ea typeface="Georgia" pitchFamily="34" charset="-122"/>
+                <a:cs typeface="Georgia" pitchFamily="34" charset="-120"/>
+              </a:rPr>
+              <a:t> (forest texts) → </a:t>
+            </a:r>
+            <a:pPr algn="l" indent="0" marL="0">
+              <a:lnSpc>
+                <a:spcPts val="1820"/>
+              </a:lnSpc>
+              <a:spcBef>
+                <a:spcPts val="300"/>
+              </a:spcBef>
+              <a:spcAft>
+                <a:spcPts val="300"/>
+              </a:spcAft>
+              <a:buNone/>
+            </a:pPr>
+            <a:r>
+              <a:rPr lang="en-US" sz="1300" b="1" i="1" dirty="0">
+                <a:solidFill>
+                  <a:srgbClr val="1C2833"/>
+                </a:solidFill>
+                <a:latin typeface="Georgia" pitchFamily="34" charset="0"/>
+                <a:ea typeface="Georgia" pitchFamily="34" charset="-122"/>
+                <a:cs typeface="Georgia" pitchFamily="34" charset="-120"/>
+              </a:rPr>
+              <a:t>Upaniṣad</a:t>
+            </a:r>
+            <a:pPr algn="l" indent="0" marL="0">
+              <a:lnSpc>
+                <a:spcPts val="1820"/>
+              </a:lnSpc>
+              <a:spcBef>
+                <a:spcPts val="300"/>
+              </a:spcBef>
+              <a:spcAft>
+                <a:spcPts val="300"/>
+              </a:spcAft>
+              <a:buNone/>
+            </a:pPr>
+            <a:r>
+              <a:rPr lang="en-US" sz="1300" dirty="0">
+                <a:solidFill>
+                  <a:srgbClr val="1C2833"/>
+                </a:solidFill>
+                <a:latin typeface="Georgia" pitchFamily="34" charset="0"/>
+                <a:ea typeface="Georgia" pitchFamily="34" charset="-122"/>
+                <a:cs typeface="Georgia" pitchFamily="34" charset="-120"/>
+              </a:rPr>
+              <a:t> (philosophical dialogues).</a:t>
+            </a:r>
+            <a:endParaRPr lang="en-US" sz="1300" dirty="0"/>
+          </a:p>
+        </p:txBody>
+      </p:sp>
+      <p:sp>
+        <p:nvSpPr>
+          <p:cNvPr id="9" name="Text 7"/>
+          <p:cNvSpPr/>
+          <p:nvPr/>
+        </p:nvSpPr>
+        <p:spPr>
+          <a:xfrm>
+            <a:off x="692051" y="2343299"/>
+            <a:ext cx="7973389" cy="461963"/>
+          </a:xfrm>
+          <a:prstGeom prst="rect">
+            <a:avLst/>
+          </a:prstGeom>
+          <a:noFill/>
+          <a:ln/>
+        </p:spPr>
+        <p:txBody>
+          <a:bodyPr wrap="square" lIns="0" tIns="0" rIns="0" bIns="0" rtlCol="0" anchor="t"/>
+          <a:lstStyle/>
+          <a:p>
+            <a:pPr algn="l" indent="0" marL="0">
+              <a:lnSpc>
+                <a:spcPts val="1820"/>
+              </a:lnSpc>
+              <a:spcBef>
+                <a:spcPts val="300"/>
+              </a:spcBef>
+              <a:spcAft>
+                <a:spcPts val="300"/>
+              </a:spcAft>
+              <a:buNone/>
+            </a:pPr>
+            <a:r>
+              <a:rPr lang="en-US" sz="1300" dirty="0">
+                <a:solidFill>
+                  <a:srgbClr val="1C2833"/>
+                </a:solidFill>
+                <a:latin typeface="Georgia" pitchFamily="34" charset="0"/>
+                <a:ea typeface="Georgia" pitchFamily="34" charset="-122"/>
+                <a:cs typeface="Georgia" pitchFamily="34" charset="-120"/>
+              </a:rPr>
+              <a:t>The </a:t>
+            </a:r>
+            <a:pPr algn="l" indent="0" marL="0">
+              <a:lnSpc>
+                <a:spcPts val="1820"/>
+              </a:lnSpc>
+              <a:spcBef>
+                <a:spcPts val="300"/>
+              </a:spcBef>
+              <a:spcAft>
+                <a:spcPts val="300"/>
+              </a:spcAft>
+              <a:buNone/>
+            </a:pPr>
+            <a:r>
+              <a:rPr lang="en-US" sz="1300" i="1" dirty="0">
+                <a:solidFill>
+                  <a:srgbClr val="1C2833"/>
+                </a:solidFill>
+                <a:latin typeface="Georgia" pitchFamily="34" charset="0"/>
+                <a:ea typeface="Georgia" pitchFamily="34" charset="-122"/>
+                <a:cs typeface="Georgia" pitchFamily="34" charset="-120"/>
+              </a:rPr>
+              <a:t>intellectual</a:t>
+            </a:r>
+            <a:pPr algn="l" indent="0" marL="0">
+              <a:lnSpc>
+                <a:spcPts val="1820"/>
+              </a:lnSpc>
+              <a:spcBef>
+                <a:spcPts val="300"/>
+              </a:spcBef>
+              <a:spcAft>
+                <a:spcPts val="300"/>
+              </a:spcAft>
+              <a:buNone/>
+            </a:pPr>
+            <a:r>
+              <a:rPr lang="en-US" sz="1300" dirty="0">
+                <a:solidFill>
+                  <a:srgbClr val="1C2833"/>
+                </a:solidFill>
+                <a:latin typeface="Georgia" pitchFamily="34" charset="0"/>
+                <a:ea typeface="Georgia" pitchFamily="34" charset="-122"/>
+                <a:cs typeface="Georgia" pitchFamily="34" charset="-120"/>
+              </a:rPr>
+              <a:t> contributions of the Veda include: Sanskrit grammar, early astronomy, early medicine, and Upanishadic philosophy.</a:t>
+            </a:r>
+            <a:endParaRPr lang="en-US" sz="1300" dirty="0"/>
+          </a:p>
+        </p:txBody>
+      </p:sp>
+      <p:sp>
+        <p:nvSpPr>
+          <p:cNvPr id="10" name="Text 8"/>
+          <p:cNvSpPr/>
+          <p:nvPr/>
+        </p:nvSpPr>
+        <p:spPr>
+          <a:xfrm>
+            <a:off x="406301" y="4434929"/>
+            <a:ext cx="8498026" cy="213271"/>
+          </a:xfrm>
+          <a:prstGeom prst="rect">
+            <a:avLst/>
+          </a:prstGeom>
+          <a:noFill/>
+          <a:ln/>
+        </p:spPr>
+        <p:txBody>
+          <a:bodyPr wrap="square" lIns="0" tIns="0" rIns="0" bIns="0" rtlCol="0" anchor="t"/>
+          <a:lstStyle/>
+          <a:p>
+            <a:pPr algn="l" indent="0" marL="0">
+              <a:lnSpc>
+                <a:spcPts val="1680"/>
+              </a:lnSpc>
+              <a:spcBef>
+                <a:spcPts val="300"/>
+              </a:spcBef>
+              <a:spcAft>
+                <a:spcPts val="300"/>
+              </a:spcAft>
+              <a:buNone/>
+            </a:pPr>
+            <a:r>
+              <a:rPr lang="en-US" sz="1200" dirty="0">
+                <a:solidFill>
+                  <a:srgbClr val="1C2833"/>
+                </a:solidFill>
+                <a:latin typeface="Arial" pitchFamily="34" charset="0"/>
+                <a:ea typeface="Arial" pitchFamily="34" charset="-122"/>
+                <a:cs typeface="Arial" pitchFamily="34" charset="-120"/>
+              </a:rPr>
+              <a:t>Middle ·  · IKS Curriculum</a:t>
+            </a:r>
+            <a:endParaRPr lang="en-US" sz="1200" dirty="0"/>
+          </a:p>
+        </p:txBody>
+      </p:sp>
+    </p:spTree>
+  </p:cSld>
+  <p:clrMapOvr>
+    <a:masterClrMapping/>
+  </p:clrMapOvr>
+</p:sld>
+</file>
+
+<file path=ppt/slides/slide15.xml><?xml version="1.0" encoding="utf-8"?>
+<p:sld xmlns:a="http://schemas.openxmlformats.org/drawingml/2006/main" xmlns:r="http://schemas.openxmlformats.org/officeDocument/2006/relationships" xmlns:p="http://schemas.openxmlformats.org/presentationml/2006/main">
+  <p:cSld name="Slide 15">
+    <p:bg>
+      <p:bgPr>
+        <a:solidFill>
+          <a:srgbClr val="FFFFFF"/>
+        </a:solidFill>
+      </p:bgPr>
+    </p:bg>
+    <p:spTree>
+      <p:nvGrpSpPr>
+        <p:cNvPr id="1" name=""/>
+        <p:cNvGrpSpPr/>
+        <p:nvPr/>
+      </p:nvGrpSpPr>
+      <p:grpSpPr>
+        <a:xfrm>
+          <a:off x="0" y="0"/>
+          <a:ext cx="0" cy="0"/>
+          <a:chOff x="0" y="0"/>
+          <a:chExt cx="0" cy="0"/>
+        </a:xfrm>
+      </p:grpSpPr>
+      <p:sp>
+        <p:nvSpPr>
+          <p:cNvPr id="2" name="Text 0"/>
+          <p:cNvSpPr/>
+          <p:nvPr/>
+        </p:nvSpPr>
+        <p:spPr>
+          <a:xfrm>
+            <a:off x="0" y="0"/>
+            <a:ext cx="9144000" cy="101501"/>
+          </a:xfrm>
+          <a:prstGeom prst="rect">
+            <a:avLst/>
+          </a:prstGeom>
+          <a:solidFill>
+            <a:srgbClr val="277884"/>
+          </a:solidFill>
+          <a:ln/>
+        </p:spPr>
+        <p:txBody>
+          <a:bodyPr wrap="square" rtlCol="0" anchor="ctr"/>
+          <a:lstStyle/>
+          <a:p>
+            <a:pPr indent="0" marL="0">
+              <a:buNone/>
+            </a:pPr>
+            <a:endParaRPr lang="en-US" dirty="0"/>
+          </a:p>
+        </p:txBody>
+      </p:sp>
+      <p:sp>
+        <p:nvSpPr>
+          <p:cNvPr id="3" name="Text 1"/>
+          <p:cNvSpPr/>
+          <p:nvPr/>
+        </p:nvSpPr>
+        <p:spPr>
+          <a:xfrm>
+            <a:off x="406301" y="457051"/>
+            <a:ext cx="8498026" cy="274290"/>
+          </a:xfrm>
+          <a:prstGeom prst="rect">
+            <a:avLst/>
+          </a:prstGeom>
+          <a:noFill/>
+          <a:ln/>
+        </p:spPr>
+        <p:txBody>
+          <a:bodyPr wrap="square" lIns="0" tIns="0" rIns="0" bIns="0" rtlCol="0" anchor="t"/>
+          <a:lstStyle/>
+          <a:p>
+            <a:pPr algn="l" indent="0" marL="0">
+              <a:lnSpc>
+                <a:spcPts val="2160"/>
+              </a:lnSpc>
+              <a:spcBef>
+                <a:spcPts val="600"/>
+              </a:spcBef>
+              <a:spcAft>
+                <a:spcPts val="800"/>
+              </a:spcAft>
+              <a:buNone/>
+            </a:pPr>
+            <a:r>
+              <a:rPr lang="en-US" sz="1800" b="1" dirty="0">
+                <a:solidFill>
+                  <a:srgbClr val="FE4447"/>
+                </a:solidFill>
+                <a:latin typeface="Georgia" pitchFamily="34" charset="0"/>
+                <a:ea typeface="Georgia" pitchFamily="34" charset="-122"/>
+                <a:cs typeface="Georgia" pitchFamily="34" charset="-120"/>
+              </a:rPr>
+              <a:t>Homework</a:t>
+            </a:r>
+            <a:endParaRPr lang="en-US" sz="1800" dirty="0"/>
+          </a:p>
+        </p:txBody>
+      </p:sp>
+      <p:sp>
+        <p:nvSpPr>
+          <p:cNvPr id="4" name="Text 2"/>
+          <p:cNvSpPr/>
+          <p:nvPr/>
+        </p:nvSpPr>
+        <p:spPr>
+          <a:xfrm>
+            <a:off x="634901" y="883593"/>
+            <a:ext cx="8102798" cy="487561"/>
+          </a:xfrm>
+          <a:prstGeom prst="rect">
+            <a:avLst/>
+          </a:prstGeom>
+          <a:noFill/>
+          <a:ln/>
+        </p:spPr>
+        <p:txBody>
+          <a:bodyPr wrap="square" lIns="0" tIns="0" rIns="0" bIns="0" rtlCol="0" anchor="t"/>
+          <a:lstStyle/>
+          <a:p>
+            <a:pPr algn="l" marL="342900" indent="-342900">
+              <a:lnSpc>
+                <a:spcPts val="1620"/>
+              </a:lnSpc>
+              <a:spcAft>
+                <a:spcPts val="300"/>
+              </a:spcAft>
+              <a:buSzPct val="100000"/>
+              <a:buChar char="•"/>
+            </a:pPr>
+            <a:r>
+              <a:rPr lang="en-US" sz="1200" dirty="0">
+                <a:solidFill>
+                  <a:srgbClr val="1C2833"/>
+                </a:solidFill>
+                <a:latin typeface="Arial" pitchFamily="34" charset="0"/>
+                <a:ea typeface="Arial" pitchFamily="34" charset="-122"/>
+                <a:cs typeface="Arial" pitchFamily="34" charset="-120"/>
+              </a:rPr>
+              <a:t>Find ONE Upaniṣad name (e.g. Īśa, Kena, Kaṭha, Praśna, Muṇḍaka, Māṇḍūkya — there are 108 traditionally, with 13 considered "principal"). Bring tomorrow.</a:t>
+            </a:r>
+            <a:endParaRPr lang="en-US" sz="1200" dirty="0"/>
+          </a:p>
+        </p:txBody>
+      </p:sp>
+      <p:sp>
+        <p:nvSpPr>
+          <p:cNvPr id="5" name="Text 3"/>
+          <p:cNvSpPr/>
+          <p:nvPr/>
+        </p:nvSpPr>
+        <p:spPr>
+          <a:xfrm>
+            <a:off x="406301" y="4434929"/>
+            <a:ext cx="8498026" cy="213271"/>
+          </a:xfrm>
+          <a:prstGeom prst="rect">
+            <a:avLst/>
+          </a:prstGeom>
+          <a:noFill/>
+          <a:ln/>
+        </p:spPr>
+        <p:txBody>
+          <a:bodyPr wrap="square" lIns="0" tIns="0" rIns="0" bIns="0" rtlCol="0" anchor="t"/>
+          <a:lstStyle/>
+          <a:p>
+            <a:pPr algn="l" indent="0" marL="0">
+              <a:lnSpc>
+                <a:spcPts val="1680"/>
+              </a:lnSpc>
+              <a:spcBef>
+                <a:spcPts val="300"/>
+              </a:spcBef>
+              <a:spcAft>
+                <a:spcPts val="300"/>
+              </a:spcAft>
+              <a:buNone/>
+            </a:pPr>
+            <a:r>
+              <a:rPr lang="en-US" sz="1200" dirty="0">
+                <a:solidFill>
+                  <a:srgbClr val="1C2833"/>
+                </a:solidFill>
+                <a:latin typeface="Arial" pitchFamily="34" charset="0"/>
+                <a:ea typeface="Arial" pitchFamily="34" charset="-122"/>
+                <a:cs typeface="Arial" pitchFamily="34" charset="-120"/>
+              </a:rPr>
+              <a:t>Middle ·  · IKS Curriculum</a:t>
+            </a:r>
+            <a:endParaRPr lang="en-US" sz="1200" dirty="0"/>
+          </a:p>
+        </p:txBody>
+      </p:sp>
+    </p:spTree>
+  </p:cSld>
+  <p:clrMapOvr>
+    <a:masterClrMapping/>
+  </p:clrMapOvr>
+</p:sld>
+</file>
+
+<file path=ppt/slides/slide16.xml><?xml version="1.0" encoding="utf-8"?>
+<p:sld xmlns:a="http://schemas.openxmlformats.org/drawingml/2006/main" xmlns:r="http://schemas.openxmlformats.org/officeDocument/2006/relationships" xmlns:p="http://schemas.openxmlformats.org/presentationml/2006/main">
+  <p:cSld name="Slide 16">
+    <p:bg>
+      <p:bgPr>
+        <a:solidFill>
+          <a:srgbClr val="FFFFFF"/>
+        </a:solidFill>
+      </p:bgPr>
+    </p:bg>
+    <p:spTree>
+      <p:nvGrpSpPr>
+        <p:cNvPr id="1" name=""/>
+        <p:cNvGrpSpPr/>
+        <p:nvPr/>
+      </p:nvGrpSpPr>
+      <p:grpSpPr>
+        <a:xfrm>
+          <a:off x="0" y="0"/>
+          <a:ext cx="0" cy="0"/>
+          <a:chOff x="0" y="0"/>
+          <a:chExt cx="0" cy="0"/>
+        </a:xfrm>
+      </p:grpSpPr>
+      <p:sp>
+        <p:nvSpPr>
+          <p:cNvPr id="2" name="Text 0"/>
+          <p:cNvSpPr/>
+          <p:nvPr/>
+        </p:nvSpPr>
+        <p:spPr>
+          <a:xfrm>
+            <a:off x="0" y="0"/>
+            <a:ext cx="9144000" cy="101501"/>
+          </a:xfrm>
+          <a:prstGeom prst="rect">
+            <a:avLst/>
+          </a:prstGeom>
+          <a:solidFill>
+            <a:srgbClr val="277884"/>
+          </a:solidFill>
+          <a:ln/>
+        </p:spPr>
+        <p:txBody>
+          <a:bodyPr wrap="square" rtlCol="0" anchor="ctr"/>
+          <a:lstStyle/>
+          <a:p>
+            <a:pPr indent="0" marL="0">
+              <a:buNone/>
+            </a:pPr>
+            <a:endParaRPr lang="en-US" dirty="0"/>
+          </a:p>
+        </p:txBody>
+      </p:sp>
+      <p:sp>
+        <p:nvSpPr>
+          <p:cNvPr id="3" name="Text 1"/>
+          <p:cNvSpPr/>
+          <p:nvPr/>
+        </p:nvSpPr>
+        <p:spPr>
+          <a:xfrm>
+            <a:off x="406301" y="457051"/>
+            <a:ext cx="8498026" cy="274290"/>
+          </a:xfrm>
+          <a:prstGeom prst="rect">
+            <a:avLst/>
+          </a:prstGeom>
+          <a:noFill/>
+          <a:ln/>
+        </p:spPr>
+        <p:txBody>
+          <a:bodyPr wrap="square" lIns="0" tIns="0" rIns="0" bIns="0" rtlCol="0" anchor="t"/>
+          <a:lstStyle/>
+          <a:p>
+            <a:pPr algn="l" indent="0" marL="0">
+              <a:lnSpc>
+                <a:spcPts val="2160"/>
+              </a:lnSpc>
+              <a:spcBef>
+                <a:spcPts val="600"/>
+              </a:spcBef>
+              <a:spcAft>
+                <a:spcPts val="800"/>
+              </a:spcAft>
+              <a:buNone/>
+            </a:pPr>
+            <a:r>
+              <a:rPr lang="en-US" sz="1800" b="1" dirty="0">
+                <a:solidFill>
+                  <a:srgbClr val="FE4447"/>
+                </a:solidFill>
+                <a:latin typeface="Georgia" pitchFamily="34" charset="0"/>
+                <a:ea typeface="Georgia" pitchFamily="34" charset="-122"/>
+                <a:cs typeface="Georgia" pitchFamily="34" charset="-120"/>
+              </a:rPr>
+              <a:t>Differentiation</a:t>
+            </a:r>
+            <a:endParaRPr lang="en-US" sz="1800" dirty="0"/>
+          </a:p>
+        </p:txBody>
+      </p:sp>
+      <p:sp>
+        <p:nvSpPr>
+          <p:cNvPr id="4" name="Text 2"/>
+          <p:cNvSpPr/>
+          <p:nvPr/>
+        </p:nvSpPr>
+        <p:spPr>
+          <a:xfrm>
+            <a:off x="634901" y="883593"/>
+            <a:ext cx="8102798" cy="525661"/>
+          </a:xfrm>
+          <a:prstGeom prst="rect">
+            <a:avLst/>
+          </a:prstGeom>
+          <a:noFill/>
+          <a:ln/>
+        </p:spPr>
+        <p:txBody>
+          <a:bodyPr wrap="square" lIns="0" tIns="0" rIns="0" bIns="0" rtlCol="0" anchor="t"/>
+          <a:lstStyle/>
+          <a:p>
+            <a:pPr algn="l" marL="342900" indent="-342900">
+              <a:lnSpc>
+                <a:spcPts val="1620"/>
+              </a:lnSpc>
+              <a:spcAft>
+                <a:spcPts val="300"/>
+              </a:spcAft>
+              <a:buSzPct val="100000"/>
+              <a:buChar char="•"/>
+            </a:pPr>
+            <a:r>
+              <a:rPr lang="en-US" sz="1200" b="1" dirty="0">
+                <a:solidFill>
+                  <a:srgbClr val="1C2833"/>
+                </a:solidFill>
+                <a:latin typeface="Arial" pitchFamily="34" charset="0"/>
+                <a:ea typeface="Arial" pitchFamily="34" charset="-122"/>
+                <a:cs typeface="Arial" pitchFamily="34" charset="-120"/>
+              </a:rPr>
+              <a:t>Tier up:</a:t>
+            </a:r>
+            <a:pPr algn="l" indent="0" marL="0">
+              <a:lnSpc>
+                <a:spcPts val="1620"/>
+              </a:lnSpc>
+              <a:spcAft>
+                <a:spcPts val="300"/>
+              </a:spcAft>
+              <a:buNone/>
+            </a:pPr>
+            <a:r>
+              <a:rPr lang="en-US" sz="1200" dirty="0">
+                <a:solidFill>
+                  <a:srgbClr val="1C2833"/>
+                </a:solidFill>
+                <a:latin typeface="Arial" pitchFamily="34" charset="0"/>
+                <a:ea typeface="Arial" pitchFamily="34" charset="-122"/>
+                <a:cs typeface="Arial" pitchFamily="34" charset="-120"/>
+              </a:rPr>
+              <a:t> Read the Īśa Upaniṣad in translation (it's 18 verses; the shortest principal Upaniṣad).</a:t>
+            </a:r>
+            <a:endParaRPr lang="en-US" sz="1200" dirty="0"/>
+          </a:p>
+          <a:p>
+            <a:pPr algn="l" marL="342900" indent="-342900">
+              <a:lnSpc>
+                <a:spcPts val="1620"/>
+              </a:lnSpc>
+              <a:spcAft>
+                <a:spcPts val="300"/>
+              </a:spcAft>
+              <a:buSzPct val="100000"/>
+              <a:buChar char="•"/>
+            </a:pPr>
+            <a:r>
+              <a:rPr lang="en-US" sz="1200" b="1" dirty="0">
+                <a:solidFill>
+                  <a:srgbClr val="1C2833"/>
+                </a:solidFill>
+                <a:latin typeface="Arial" pitchFamily="34" charset="0"/>
+                <a:ea typeface="Arial" pitchFamily="34" charset="-122"/>
+                <a:cs typeface="Arial" pitchFamily="34" charset="-120"/>
+              </a:rPr>
+              <a:t>Tier down:</a:t>
+            </a:r>
+            <a:pPr algn="l" indent="0" marL="0">
+              <a:lnSpc>
+                <a:spcPts val="1620"/>
+              </a:lnSpc>
+              <a:spcAft>
+                <a:spcPts val="300"/>
+              </a:spcAft>
+              <a:buNone/>
+            </a:pPr>
+            <a:r>
+              <a:rPr lang="en-US" sz="1200" dirty="0">
+                <a:solidFill>
+                  <a:srgbClr val="1C2833"/>
+                </a:solidFill>
+                <a:latin typeface="Arial" pitchFamily="34" charset="0"/>
+                <a:ea typeface="Arial" pitchFamily="34" charset="-122"/>
+                <a:cs typeface="Arial" pitchFamily="34" charset="-120"/>
+              </a:rPr>
+              <a:t> Just remember the four Vedas + the four layers.</a:t>
+            </a:r>
+            <a:endParaRPr lang="en-US" sz="1200" dirty="0"/>
+          </a:p>
+        </p:txBody>
+      </p:sp>
+      <p:sp>
+        <p:nvSpPr>
+          <p:cNvPr id="5" name="Text 3"/>
+          <p:cNvSpPr/>
+          <p:nvPr/>
+        </p:nvSpPr>
+        <p:spPr>
+          <a:xfrm>
+            <a:off x="406301" y="4434929"/>
+            <a:ext cx="8498026" cy="213271"/>
+          </a:xfrm>
+          <a:prstGeom prst="rect">
+            <a:avLst/>
+          </a:prstGeom>
+          <a:noFill/>
+          <a:ln/>
+        </p:spPr>
+        <p:txBody>
+          <a:bodyPr wrap="square" lIns="0" tIns="0" rIns="0" bIns="0" rtlCol="0" anchor="t"/>
+          <a:lstStyle/>
+          <a:p>
+            <a:pPr algn="l" indent="0" marL="0">
+              <a:lnSpc>
+                <a:spcPts val="1680"/>
+              </a:lnSpc>
+              <a:spcBef>
+                <a:spcPts val="300"/>
+              </a:spcBef>
+              <a:spcAft>
+                <a:spcPts val="300"/>
+              </a:spcAft>
+              <a:buNone/>
+            </a:pPr>
+            <a:r>
+              <a:rPr lang="en-US" sz="1200" dirty="0">
+                <a:solidFill>
+                  <a:srgbClr val="1C2833"/>
+                </a:solidFill>
+                <a:latin typeface="Arial" pitchFamily="34" charset="0"/>
+                <a:ea typeface="Arial" pitchFamily="34" charset="-122"/>
+                <a:cs typeface="Arial" pitchFamily="34" charset="-120"/>
+              </a:rPr>
+              <a:t>Middle ·  · IKS Curriculum</a:t>
+            </a:r>
+            <a:endParaRPr lang="en-US" sz="1200" dirty="0"/>
+          </a:p>
+        </p:txBody>
+      </p:sp>
+    </p:spTree>
+  </p:cSld>
+  <p:clrMapOvr>
+    <a:masterClrMapping/>
+  </p:clrMapOvr>
+</p:sld>
+</file>
+
+<file path=ppt/slides/slide17.xml><?xml version="1.0" encoding="utf-8"?>
+<p:sld xmlns:a="http://schemas.openxmlformats.org/drawingml/2006/main" xmlns:r="http://schemas.openxmlformats.org/officeDocument/2006/relationships" xmlns:p="http://schemas.openxmlformats.org/presentationml/2006/main">
+  <p:cSld name="Slide 17">
+    <p:bg>
+      <p:bgPr>
+        <a:solidFill>
+          <a:srgbClr val="FFFFFF"/>
+        </a:solidFill>
+      </p:bgPr>
+    </p:bg>
+    <p:spTree>
+      <p:nvGrpSpPr>
+        <p:cNvPr id="1" name=""/>
+        <p:cNvGrpSpPr/>
+        <p:nvPr/>
+      </p:nvGrpSpPr>
+      <p:grpSpPr>
+        <a:xfrm>
+          <a:off x="0" y="0"/>
+          <a:ext cx="0" cy="0"/>
+          <a:chOff x="0" y="0"/>
+          <a:chExt cx="0" cy="0"/>
+        </a:xfrm>
+      </p:grpSpPr>
+      <p:sp>
+        <p:nvSpPr>
+          <p:cNvPr id="2" name="Text 0"/>
+          <p:cNvSpPr/>
+          <p:nvPr/>
+        </p:nvSpPr>
+        <p:spPr>
+          <a:xfrm>
+            <a:off x="0" y="0"/>
+            <a:ext cx="9144000" cy="101501"/>
+          </a:xfrm>
+          <a:prstGeom prst="rect">
+            <a:avLst/>
+          </a:prstGeom>
+          <a:solidFill>
+            <a:srgbClr val="277884"/>
+          </a:solidFill>
+          <a:ln/>
+        </p:spPr>
+        <p:txBody>
+          <a:bodyPr wrap="square" rtlCol="0" anchor="ctr"/>
+          <a:lstStyle/>
+          <a:p>
+            <a:pPr indent="0" marL="0">
+              <a:buNone/>
+            </a:pPr>
+            <a:endParaRPr lang="en-US" dirty="0"/>
+          </a:p>
+        </p:txBody>
+      </p:sp>
+      <p:sp>
+        <p:nvSpPr>
+          <p:cNvPr id="3" name="Text 1"/>
+          <p:cNvSpPr/>
+          <p:nvPr/>
+        </p:nvSpPr>
+        <p:spPr>
+          <a:xfrm>
+            <a:off x="406301" y="457051"/>
+            <a:ext cx="8498026" cy="274290"/>
+          </a:xfrm>
+          <a:prstGeom prst="rect">
+            <a:avLst/>
+          </a:prstGeom>
+          <a:noFill/>
+          <a:ln/>
+        </p:spPr>
+        <p:txBody>
+          <a:bodyPr wrap="square" lIns="0" tIns="0" rIns="0" bIns="0" rtlCol="0" anchor="t"/>
+          <a:lstStyle/>
+          <a:p>
+            <a:pPr algn="l" indent="0" marL="0">
+              <a:lnSpc>
+                <a:spcPts val="2160"/>
+              </a:lnSpc>
+              <a:spcBef>
+                <a:spcPts val="600"/>
+              </a:spcBef>
+              <a:spcAft>
+                <a:spcPts val="800"/>
+              </a:spcAft>
+              <a:buNone/>
+            </a:pPr>
+            <a:r>
+              <a:rPr lang="en-US" sz="1800" b="1" dirty="0">
+                <a:solidFill>
+                  <a:srgbClr val="FE4447"/>
+                </a:solidFill>
+                <a:latin typeface="Georgia" pitchFamily="34" charset="0"/>
+                <a:ea typeface="Georgia" pitchFamily="34" charset="-122"/>
+                <a:cs typeface="Georgia" pitchFamily="34" charset="-120"/>
+              </a:rPr>
+              <a:t>Teacher notes</a:t>
+            </a:r>
+            <a:endParaRPr lang="en-US" sz="1800" dirty="0"/>
+          </a:p>
+        </p:txBody>
+      </p:sp>
+      <p:sp>
+        <p:nvSpPr>
+          <p:cNvPr id="4" name="Text 2"/>
+          <p:cNvSpPr/>
+          <p:nvPr/>
+        </p:nvSpPr>
+        <p:spPr>
+          <a:xfrm>
+            <a:off x="634901" y="883593"/>
+            <a:ext cx="8102798" cy="937022"/>
+          </a:xfrm>
+          <a:prstGeom prst="rect">
+            <a:avLst/>
+          </a:prstGeom>
+          <a:noFill/>
+          <a:ln/>
+        </p:spPr>
+        <p:txBody>
+          <a:bodyPr wrap="square" lIns="0" tIns="0" rIns="0" bIns="0" rtlCol="0" anchor="t"/>
+          <a:lstStyle/>
+          <a:p>
+            <a:pPr algn="l" marL="342900" indent="-342900">
+              <a:lnSpc>
+                <a:spcPts val="1620"/>
+              </a:lnSpc>
+              <a:spcAft>
+                <a:spcPts val="300"/>
+              </a:spcAft>
+              <a:buSzPct val="100000"/>
+              <a:buChar char="•"/>
+            </a:pPr>
+            <a:r>
+              <a:rPr lang="en-US" sz="1200" dirty="0">
+                <a:solidFill>
+                  <a:srgbClr val="1C2833"/>
+                </a:solidFill>
+                <a:latin typeface="Arial" pitchFamily="34" charset="0"/>
+                <a:ea typeface="Arial" pitchFamily="34" charset="-122"/>
+                <a:cs typeface="Arial" pitchFamily="34" charset="-120"/>
+              </a:rPr>
+              <a:t>The dating "~1500–1200 BCE" for the Ṛg Veda is the mainstream scholarly view (Indo-European migration model). Some Indian scholars argue for earlier dates. Acknowledge both; this isn't the module to resolve the debate.</a:t>
+            </a:r>
+            <a:endParaRPr lang="en-US" sz="1200" dirty="0"/>
+          </a:p>
+          <a:p>
+            <a:pPr algn="l" marL="342900" indent="-342900">
+              <a:lnSpc>
+                <a:spcPts val="1620"/>
+              </a:lnSpc>
+              <a:spcAft>
+                <a:spcPts val="300"/>
+              </a:spcAft>
+              <a:buSzPct val="100000"/>
+              <a:buChar char="•"/>
+            </a:pPr>
+            <a:r>
+              <a:rPr lang="en-US" sz="1200" dirty="0">
+                <a:solidFill>
+                  <a:srgbClr val="1C2833"/>
+                </a:solidFill>
+                <a:latin typeface="Arial" pitchFamily="34" charset="0"/>
+                <a:ea typeface="Arial" pitchFamily="34" charset="-122"/>
+                <a:cs typeface="Arial" pitchFamily="34" charset="-120"/>
+              </a:rPr>
+              <a:t>The four-Veda framing is itself a classification. Some Vedic texts don't fit cleanly. The grid is a useful first map, not the final word.</a:t>
+            </a:r>
+            <a:endParaRPr lang="en-US" sz="1200" dirty="0"/>
+          </a:p>
+        </p:txBody>
+      </p:sp>
+      <p:sp>
+        <p:nvSpPr>
+          <p:cNvPr id="5" name="Text 3"/>
+          <p:cNvSpPr/>
+          <p:nvPr/>
+        </p:nvSpPr>
+        <p:spPr>
+          <a:xfrm>
+            <a:off x="406301" y="4434929"/>
+            <a:ext cx="8498026" cy="213271"/>
+          </a:xfrm>
+          <a:prstGeom prst="rect">
+            <a:avLst/>
+          </a:prstGeom>
+          <a:noFill/>
+          <a:ln/>
+        </p:spPr>
+        <p:txBody>
+          <a:bodyPr wrap="square" lIns="0" tIns="0" rIns="0" bIns="0" rtlCol="0" anchor="t"/>
+          <a:lstStyle/>
+          <a:p>
+            <a:pPr algn="l" indent="0" marL="0">
+              <a:lnSpc>
+                <a:spcPts val="1680"/>
+              </a:lnSpc>
+              <a:spcBef>
+                <a:spcPts val="300"/>
+              </a:spcBef>
+              <a:spcAft>
+                <a:spcPts val="300"/>
+              </a:spcAft>
+              <a:buNone/>
+            </a:pPr>
+            <a:r>
+              <a:rPr lang="en-US" sz="1200" dirty="0">
+                <a:solidFill>
+                  <a:srgbClr val="1C2833"/>
+                </a:solidFill>
+                <a:latin typeface="Arial" pitchFamily="34" charset="0"/>
+                <a:ea typeface="Arial" pitchFamily="34" charset="-122"/>
+                <a:cs typeface="Arial" pitchFamily="34" charset="-120"/>
+              </a:rPr>
+              <a:t>Middle ·  · IKS Curriculum</a:t>
+            </a:r>
+            <a:endParaRPr lang="en-US" sz="1200" dirty="0"/>
+          </a:p>
+        </p:txBody>
+      </p:sp>
+    </p:spTree>
+  </p:cSld>
+  <p:clrMapOvr>
+    <a:masterClrMapping/>
+  </p:clrMapOvr>
+</p:sld>
+</file>
+
+<file path=ppt/slides/slide18.xml><?xml version="1.0" encoding="utf-8"?>
+<p:sld xmlns:a="http://schemas.openxmlformats.org/drawingml/2006/main" xmlns:r="http://schemas.openxmlformats.org/officeDocument/2006/relationships" xmlns:p="http://schemas.openxmlformats.org/presentationml/2006/main">
+  <p:cSld name="Slide 18">
+    <p:bg>
+      <p:bgPr>
+        <a:solidFill>
+          <a:srgbClr val="FFFFFF"/>
+        </a:solidFill>
+      </p:bgPr>
+    </p:bg>
+    <p:spTree>
+      <p:nvGrpSpPr>
+        <p:cNvPr id="1" name=""/>
+        <p:cNvGrpSpPr/>
+        <p:nvPr/>
+      </p:nvGrpSpPr>
+      <p:grpSpPr>
+        <a:xfrm>
+          <a:off x="0" y="0"/>
+          <a:ext cx="0" cy="0"/>
+          <a:chOff x="0" y="0"/>
+          <a:chExt cx="0" cy="0"/>
+        </a:xfrm>
+      </p:grpSpPr>
+      <p:sp>
+        <p:nvSpPr>
+          <p:cNvPr id="2" name="Text 0"/>
+          <p:cNvSpPr/>
+          <p:nvPr/>
+        </p:nvSpPr>
+        <p:spPr>
+          <a:xfrm>
+            <a:off x="0" y="0"/>
+            <a:ext cx="9144000" cy="101501"/>
+          </a:xfrm>
+          <a:prstGeom prst="rect">
+            <a:avLst/>
+          </a:prstGeom>
+          <a:solidFill>
+            <a:srgbClr val="277884"/>
+          </a:solidFill>
+          <a:ln/>
+        </p:spPr>
+        <p:txBody>
+          <a:bodyPr wrap="square" rtlCol="0" anchor="ctr"/>
+          <a:lstStyle/>
+          <a:p>
+            <a:pPr indent="0" marL="0">
+              <a:buNone/>
+            </a:pPr>
+            <a:endParaRPr lang="en-US" dirty="0"/>
+          </a:p>
+        </p:txBody>
+      </p:sp>
+      <p:sp>
+        <p:nvSpPr>
+          <p:cNvPr id="3" name="Text 1"/>
+          <p:cNvSpPr/>
+          <p:nvPr/>
+        </p:nvSpPr>
+        <p:spPr>
+          <a:xfrm>
+            <a:off x="406301" y="457051"/>
+            <a:ext cx="8498026" cy="274290"/>
+          </a:xfrm>
+          <a:prstGeom prst="rect">
+            <a:avLst/>
+          </a:prstGeom>
+          <a:noFill/>
+          <a:ln/>
+        </p:spPr>
+        <p:txBody>
+          <a:bodyPr wrap="square" lIns="0" tIns="0" rIns="0" bIns="0" rtlCol="0" anchor="t"/>
+          <a:lstStyle/>
+          <a:p>
+            <a:pPr algn="l" indent="0" marL="0">
+              <a:lnSpc>
+                <a:spcPts val="2160"/>
+              </a:lnSpc>
+              <a:spcBef>
+                <a:spcPts val="600"/>
+              </a:spcBef>
+              <a:spcAft>
+                <a:spcPts val="800"/>
+              </a:spcAft>
+              <a:buNone/>
+            </a:pPr>
+            <a:r>
+              <a:rPr lang="en-US" sz="1800" b="1" dirty="0">
+                <a:solidFill>
+                  <a:srgbClr val="FE4447"/>
+                </a:solidFill>
+                <a:latin typeface="Georgia" pitchFamily="34" charset="0"/>
+                <a:ea typeface="Georgia" pitchFamily="34" charset="-122"/>
+                <a:cs typeface="Georgia" pitchFamily="34" charset="-120"/>
+              </a:rPr>
+              <a:t>Citation(s) used</a:t>
+            </a:r>
+            <a:endParaRPr lang="en-US" sz="1800" dirty="0"/>
+          </a:p>
+        </p:txBody>
+      </p:sp>
+      <p:sp>
+        <p:nvSpPr>
+          <p:cNvPr id="4" name="Text 2"/>
+          <p:cNvSpPr/>
+          <p:nvPr/>
+        </p:nvSpPr>
+        <p:spPr>
+          <a:xfrm>
+            <a:off x="634901" y="883593"/>
+            <a:ext cx="8102798" cy="525661"/>
+          </a:xfrm>
+          <a:prstGeom prst="rect">
+            <a:avLst/>
+          </a:prstGeom>
+          <a:noFill/>
+          <a:ln/>
+        </p:spPr>
+        <p:txBody>
+          <a:bodyPr wrap="square" lIns="0" tIns="0" rIns="0" bIns="0" rtlCol="0" anchor="t"/>
+          <a:lstStyle/>
+          <a:p>
+            <a:pPr algn="l" marL="342900" indent="-342900">
+              <a:lnSpc>
+                <a:spcPts val="1620"/>
+              </a:lnSpc>
+              <a:spcAft>
+                <a:spcPts val="300"/>
+              </a:spcAft>
+              <a:buSzPct val="100000"/>
+              <a:buChar char="•"/>
+            </a:pPr>
+            <a:r>
+              <a:rPr lang="en-US" sz="1200" dirty="0">
+                <a:solidFill>
+                  <a:srgbClr val="1C2833"/>
+                </a:solidFill>
+                <a:latin typeface="Arial" pitchFamily="34" charset="0"/>
+                <a:ea typeface="Arial" pitchFamily="34" charset="-122"/>
+                <a:cs typeface="Arial" pitchFamily="34" charset="-120"/>
+              </a:rPr>
+              <a:t>Ṛg Veda 1.1 — Jamison &amp; Brereton (2014) translation.</a:t>
+            </a:r>
+            <a:endParaRPr lang="en-US" sz="1200" dirty="0"/>
+          </a:p>
+          <a:p>
+            <a:pPr algn="l" marL="342900" indent="-342900">
+              <a:lnSpc>
+                <a:spcPts val="1620"/>
+              </a:lnSpc>
+              <a:spcAft>
+                <a:spcPts val="300"/>
+              </a:spcAft>
+              <a:buSzPct val="100000"/>
+              <a:buChar char="•"/>
+            </a:pPr>
+            <a:r>
+              <a:rPr lang="en-US" sz="1200" dirty="0">
+                <a:solidFill>
+                  <a:srgbClr val="1C2833"/>
+                </a:solidFill>
+                <a:latin typeface="Arial" pitchFamily="34" charset="0"/>
+                <a:ea typeface="Arial" pitchFamily="34" charset="-122"/>
+                <a:cs typeface="Arial" pitchFamily="34" charset="-120"/>
+              </a:rPr>
+              <a:t>Pollock (2006) on Vedic transmission and linguistic precision.</a:t>
+            </a:r>
+            <a:endParaRPr lang="en-US" sz="1200" dirty="0"/>
+          </a:p>
+        </p:txBody>
+      </p:sp>
+      <p:sp>
+        <p:nvSpPr>
+          <p:cNvPr id="5" name="Text 3"/>
           <p:cNvSpPr/>
           <p:nvPr/>
         </p:nvSpPr>
@@ -3020,7 +5530,7 @@
                 <a:ea typeface="Georgia" pitchFamily="34" charset="-122"/>
                 <a:cs typeface="Georgia" pitchFamily="34" charset="-120"/>
               </a:rPr>
-              <a:t>Materials</a:t>
+              <a:t>Learning objective</a:t>
             </a:r>
             <a:endParaRPr lang="en-US" sz="1800" dirty="0"/>
           </a:p>
@@ -3035,7 +5545,7 @@
         <p:spPr>
           <a:xfrm>
             <a:off x="406301" y="870942"/>
-            <a:ext cx="8498026" cy="213271"/>
+            <a:ext cx="8498026" cy="426541"/>
           </a:xfrm>
           <a:prstGeom prst="rect">
             <a:avLst/>
@@ -3068,7 +5578,7 @@
                 <a:ea typeface="Arial" pitchFamily="34" charset="-122"/>
                 <a:cs typeface="Arial" pitchFamily="34" charset="-120"/>
               </a:rPr>
-              <a:t>– Wall chart: 4 Vedas × 4 layers grid – Printed extract: Ṛg Veda 1.1 (Agni hymn) with translation</a:t>
+              <a:t>Students name the four Vedas, distinguish the four textual layers within each Veda, and identify what counts as "Vedic intellectual contribution" beyond ritual.</a:t>
             </a:r>
             <a:endParaRPr lang="en-US" sz="1200" dirty="0"/>
           </a:p>
@@ -3226,7 +5736,7 @@
                 <a:ea typeface="Georgia" pitchFamily="34" charset="-122"/>
                 <a:cs typeface="Georgia" pitchFamily="34" charset="-120"/>
               </a:rPr>
-              <a:t>Vocabulary</a:t>
+              <a:t>Materials</a:t>
             </a:r>
             <a:endParaRPr lang="en-US" sz="1800" dirty="0"/>
           </a:p>
@@ -3241,7 +5751,7 @@
         <p:spPr>
           <a:xfrm>
             <a:off x="634901" y="883593"/>
-            <a:ext cx="8102798" cy="1013222"/>
+            <a:ext cx="8102798" cy="525661"/>
           </a:xfrm>
           <a:prstGeom prst="rect">
             <a:avLst/>
@@ -3264,7 +5774,7 @@
               <a:buChar char="•"/>
             </a:pPr>
             <a:r>
-              <a:rPr lang="en-US" sz="1200" i="1" dirty="0">
+              <a:rPr lang="en-US" sz="1200" dirty="0">
                 <a:solidFill>
                   <a:srgbClr val="1C2833"/>
                 </a:solidFill>
@@ -3272,16 +5782,20 @@
                 <a:ea typeface="Arial" pitchFamily="34" charset="-122"/>
                 <a:cs typeface="Arial" pitchFamily="34" charset="-120"/>
               </a:rPr>
-              <a:t>Saṃhitā</a:t>
-            </a:r>
-            <a:pPr algn="l" indent="0" marL="0">
+              <a:t>Wall chart: 4 Vedas × 4 layers grid</a:t>
+            </a:r>
+            <a:endParaRPr lang="en-US" sz="1200" dirty="0"/>
+          </a:p>
+          <a:p>
+            <a:pPr algn="l" marL="342900" indent="-342900">
               <a:lnSpc>
                 <a:spcPts val="1620"/>
               </a:lnSpc>
               <a:spcAft>
                 <a:spcPts val="300"/>
               </a:spcAft>
-              <a:buNone/>
+              <a:buSzPct val="100000"/>
+              <a:buChar char="•"/>
             </a:pPr>
             <a:r>
               <a:rPr lang="en-US" sz="1200" dirty="0">
@@ -3292,139 +5806,7 @@
                 <a:ea typeface="Arial" pitchFamily="34" charset="-122"/>
                 <a:cs typeface="Arial" pitchFamily="34" charset="-120"/>
               </a:rPr>
-              <a:t> — "collection"; the hymn layer</a:t>
-            </a:r>
-            <a:endParaRPr lang="en-US" sz="1200" dirty="0"/>
-          </a:p>
-          <a:p>
-            <a:pPr algn="l" marL="342900" indent="-342900">
-              <a:lnSpc>
-                <a:spcPts val="1620"/>
-              </a:lnSpc>
-              <a:spcAft>
-                <a:spcPts val="300"/>
-              </a:spcAft>
-              <a:buSzPct val="100000"/>
-              <a:buChar char="•"/>
-            </a:pPr>
-            <a:r>
-              <a:rPr lang="en-US" sz="1200" i="1" dirty="0">
-                <a:solidFill>
-                  <a:srgbClr val="1C2833"/>
-                </a:solidFill>
-                <a:latin typeface="Arial" pitchFamily="34" charset="0"/>
-                <a:ea typeface="Arial" pitchFamily="34" charset="-122"/>
-                <a:cs typeface="Arial" pitchFamily="34" charset="-120"/>
-              </a:rPr>
-              <a:t>Brāhmaṇa</a:t>
-            </a:r>
-            <a:pPr algn="l" indent="0" marL="0">
-              <a:lnSpc>
-                <a:spcPts val="1620"/>
-              </a:lnSpc>
-              <a:spcAft>
-                <a:spcPts val="300"/>
-              </a:spcAft>
-              <a:buNone/>
-            </a:pPr>
-            <a:r>
-              <a:rPr lang="en-US" sz="1200" dirty="0">
-                <a:solidFill>
-                  <a:srgbClr val="1C2833"/>
-                </a:solidFill>
-                <a:latin typeface="Arial" pitchFamily="34" charset="0"/>
-                <a:ea typeface="Arial" pitchFamily="34" charset="-122"/>
-                <a:cs typeface="Arial" pitchFamily="34" charset="-120"/>
-              </a:rPr>
-              <a:t> — ritual commentaries</a:t>
-            </a:r>
-            <a:endParaRPr lang="en-US" sz="1200" dirty="0"/>
-          </a:p>
-          <a:p>
-            <a:pPr algn="l" marL="342900" indent="-342900">
-              <a:lnSpc>
-                <a:spcPts val="1620"/>
-              </a:lnSpc>
-              <a:spcAft>
-                <a:spcPts val="300"/>
-              </a:spcAft>
-              <a:buSzPct val="100000"/>
-              <a:buChar char="•"/>
-            </a:pPr>
-            <a:r>
-              <a:rPr lang="en-US" sz="1200" i="1" dirty="0">
-                <a:solidFill>
-                  <a:srgbClr val="1C2833"/>
-                </a:solidFill>
-                <a:latin typeface="Arial" pitchFamily="34" charset="0"/>
-                <a:ea typeface="Arial" pitchFamily="34" charset="-122"/>
-                <a:cs typeface="Arial" pitchFamily="34" charset="-120"/>
-              </a:rPr>
-              <a:t>Āraṇyaka</a:t>
-            </a:r>
-            <a:pPr algn="l" indent="0" marL="0">
-              <a:lnSpc>
-                <a:spcPts val="1620"/>
-              </a:lnSpc>
-              <a:spcAft>
-                <a:spcPts val="300"/>
-              </a:spcAft>
-              <a:buNone/>
-            </a:pPr>
-            <a:r>
-              <a:rPr lang="en-US" sz="1200" dirty="0">
-                <a:solidFill>
-                  <a:srgbClr val="1C2833"/>
-                </a:solidFill>
-                <a:latin typeface="Arial" pitchFamily="34" charset="0"/>
-                <a:ea typeface="Arial" pitchFamily="34" charset="-122"/>
-                <a:cs typeface="Arial" pitchFamily="34" charset="-120"/>
-              </a:rPr>
-              <a:t> — "forest texts"; intermediate philosophical</a:t>
-            </a:r>
-            <a:endParaRPr lang="en-US" sz="1200" dirty="0"/>
-          </a:p>
-          <a:p>
-            <a:pPr algn="l" marL="342900" indent="-342900">
-              <a:lnSpc>
-                <a:spcPts val="1620"/>
-              </a:lnSpc>
-              <a:spcAft>
-                <a:spcPts val="300"/>
-              </a:spcAft>
-              <a:buSzPct val="100000"/>
-              <a:buChar char="•"/>
-            </a:pPr>
-            <a:r>
-              <a:rPr lang="en-US" sz="1200" i="1" dirty="0">
-                <a:solidFill>
-                  <a:srgbClr val="1C2833"/>
-                </a:solidFill>
-                <a:latin typeface="Arial" pitchFamily="34" charset="0"/>
-                <a:ea typeface="Arial" pitchFamily="34" charset="-122"/>
-                <a:cs typeface="Arial" pitchFamily="34" charset="-120"/>
-              </a:rPr>
-              <a:t>Upaniṣad</a:t>
-            </a:r>
-            <a:pPr algn="l" indent="0" marL="0">
-              <a:lnSpc>
-                <a:spcPts val="1620"/>
-              </a:lnSpc>
-              <a:spcAft>
-                <a:spcPts val="300"/>
-              </a:spcAft>
-              <a:buNone/>
-            </a:pPr>
-            <a:r>
-              <a:rPr lang="en-US" sz="1200" dirty="0">
-                <a:solidFill>
-                  <a:srgbClr val="1C2833"/>
-                </a:solidFill>
-                <a:latin typeface="Arial" pitchFamily="34" charset="0"/>
-                <a:ea typeface="Arial" pitchFamily="34" charset="-122"/>
-                <a:cs typeface="Arial" pitchFamily="34" charset="-120"/>
-              </a:rPr>
-              <a:t> — "sitting near"; philosophical dialogues</a:t>
+              <a:t>Printed extract: Ṛg Veda 1.1 (Agni hymn) with translation</a:t>
             </a:r>
             <a:endParaRPr lang="en-US" sz="1200" dirty="0"/>
           </a:p>
@@ -3582,7 +5964,7 @@
                 <a:ea typeface="Georgia" pitchFamily="34" charset="-122"/>
                 <a:cs typeface="Georgia" pitchFamily="34" charset="-120"/>
               </a:rPr>
-              <a:t>Flow</a:t>
+              <a:t>Vocabulary</a:t>
             </a:r>
             <a:endParaRPr lang="en-US" sz="1800" dirty="0"/>
           </a:p>
@@ -3591,6 +5973,204 @@
       <p:sp>
         <p:nvSpPr>
           <p:cNvPr id="4" name="Text 2"/>
+          <p:cNvSpPr/>
+          <p:nvPr/>
+        </p:nvSpPr>
+        <p:spPr>
+          <a:xfrm>
+            <a:off x="634901" y="883593"/>
+            <a:ext cx="8102798" cy="1013222"/>
+          </a:xfrm>
+          <a:prstGeom prst="rect">
+            <a:avLst/>
+          </a:prstGeom>
+          <a:noFill/>
+          <a:ln/>
+        </p:spPr>
+        <p:txBody>
+          <a:bodyPr wrap="square" lIns="0" tIns="0" rIns="0" bIns="0" rtlCol="0" anchor="t"/>
+          <a:lstStyle/>
+          <a:p>
+            <a:pPr algn="l" marL="342900" indent="-342900">
+              <a:lnSpc>
+                <a:spcPts val="1620"/>
+              </a:lnSpc>
+              <a:spcAft>
+                <a:spcPts val="300"/>
+              </a:spcAft>
+              <a:buSzPct val="100000"/>
+              <a:buChar char="•"/>
+            </a:pPr>
+            <a:r>
+              <a:rPr lang="en-US" sz="1200" i="1" dirty="0">
+                <a:solidFill>
+                  <a:srgbClr val="1C2833"/>
+                </a:solidFill>
+                <a:latin typeface="Arial" pitchFamily="34" charset="0"/>
+                <a:ea typeface="Arial" pitchFamily="34" charset="-122"/>
+                <a:cs typeface="Arial" pitchFamily="34" charset="-120"/>
+              </a:rPr>
+              <a:t>Saṃhitā</a:t>
+            </a:r>
+            <a:pPr algn="l" indent="0" marL="0">
+              <a:lnSpc>
+                <a:spcPts val="1620"/>
+              </a:lnSpc>
+              <a:spcAft>
+                <a:spcPts val="300"/>
+              </a:spcAft>
+              <a:buNone/>
+            </a:pPr>
+            <a:r>
+              <a:rPr lang="en-US" sz="1200" dirty="0">
+                <a:solidFill>
+                  <a:srgbClr val="1C2833"/>
+                </a:solidFill>
+                <a:latin typeface="Arial" pitchFamily="34" charset="0"/>
+                <a:ea typeface="Arial" pitchFamily="34" charset="-122"/>
+                <a:cs typeface="Arial" pitchFamily="34" charset="-120"/>
+              </a:rPr>
+              <a:t> — "collection"; the hymn layer</a:t>
+            </a:r>
+            <a:endParaRPr lang="en-US" sz="1200" dirty="0"/>
+          </a:p>
+          <a:p>
+            <a:pPr algn="l" marL="342900" indent="-342900">
+              <a:lnSpc>
+                <a:spcPts val="1620"/>
+              </a:lnSpc>
+              <a:spcAft>
+                <a:spcPts val="300"/>
+              </a:spcAft>
+              <a:buSzPct val="100000"/>
+              <a:buChar char="•"/>
+            </a:pPr>
+            <a:r>
+              <a:rPr lang="en-US" sz="1200" i="1" dirty="0">
+                <a:solidFill>
+                  <a:srgbClr val="1C2833"/>
+                </a:solidFill>
+                <a:latin typeface="Arial" pitchFamily="34" charset="0"/>
+                <a:ea typeface="Arial" pitchFamily="34" charset="-122"/>
+                <a:cs typeface="Arial" pitchFamily="34" charset="-120"/>
+              </a:rPr>
+              <a:t>Brāhmaṇa</a:t>
+            </a:r>
+            <a:pPr algn="l" indent="0" marL="0">
+              <a:lnSpc>
+                <a:spcPts val="1620"/>
+              </a:lnSpc>
+              <a:spcAft>
+                <a:spcPts val="300"/>
+              </a:spcAft>
+              <a:buNone/>
+            </a:pPr>
+            <a:r>
+              <a:rPr lang="en-US" sz="1200" dirty="0">
+                <a:solidFill>
+                  <a:srgbClr val="1C2833"/>
+                </a:solidFill>
+                <a:latin typeface="Arial" pitchFamily="34" charset="0"/>
+                <a:ea typeface="Arial" pitchFamily="34" charset="-122"/>
+                <a:cs typeface="Arial" pitchFamily="34" charset="-120"/>
+              </a:rPr>
+              <a:t> — ritual commentaries</a:t>
+            </a:r>
+            <a:endParaRPr lang="en-US" sz="1200" dirty="0"/>
+          </a:p>
+          <a:p>
+            <a:pPr algn="l" marL="342900" indent="-342900">
+              <a:lnSpc>
+                <a:spcPts val="1620"/>
+              </a:lnSpc>
+              <a:spcAft>
+                <a:spcPts val="300"/>
+              </a:spcAft>
+              <a:buSzPct val="100000"/>
+              <a:buChar char="•"/>
+            </a:pPr>
+            <a:r>
+              <a:rPr lang="en-US" sz="1200" i="1" dirty="0">
+                <a:solidFill>
+                  <a:srgbClr val="1C2833"/>
+                </a:solidFill>
+                <a:latin typeface="Arial" pitchFamily="34" charset="0"/>
+                <a:ea typeface="Arial" pitchFamily="34" charset="-122"/>
+                <a:cs typeface="Arial" pitchFamily="34" charset="-120"/>
+              </a:rPr>
+              <a:t>Āraṇyaka</a:t>
+            </a:r>
+            <a:pPr algn="l" indent="0" marL="0">
+              <a:lnSpc>
+                <a:spcPts val="1620"/>
+              </a:lnSpc>
+              <a:spcAft>
+                <a:spcPts val="300"/>
+              </a:spcAft>
+              <a:buNone/>
+            </a:pPr>
+            <a:r>
+              <a:rPr lang="en-US" sz="1200" dirty="0">
+                <a:solidFill>
+                  <a:srgbClr val="1C2833"/>
+                </a:solidFill>
+                <a:latin typeface="Arial" pitchFamily="34" charset="0"/>
+                <a:ea typeface="Arial" pitchFamily="34" charset="-122"/>
+                <a:cs typeface="Arial" pitchFamily="34" charset="-120"/>
+              </a:rPr>
+              <a:t> — "forest texts"; intermediate philosophical</a:t>
+            </a:r>
+            <a:endParaRPr lang="en-US" sz="1200" dirty="0"/>
+          </a:p>
+          <a:p>
+            <a:pPr algn="l" marL="342900" indent="-342900">
+              <a:lnSpc>
+                <a:spcPts val="1620"/>
+              </a:lnSpc>
+              <a:spcAft>
+                <a:spcPts val="300"/>
+              </a:spcAft>
+              <a:buSzPct val="100000"/>
+              <a:buChar char="•"/>
+            </a:pPr>
+            <a:r>
+              <a:rPr lang="en-US" sz="1200" i="1" dirty="0">
+                <a:solidFill>
+                  <a:srgbClr val="1C2833"/>
+                </a:solidFill>
+                <a:latin typeface="Arial" pitchFamily="34" charset="0"/>
+                <a:ea typeface="Arial" pitchFamily="34" charset="-122"/>
+                <a:cs typeface="Arial" pitchFamily="34" charset="-120"/>
+              </a:rPr>
+              <a:t>Upaniṣad</a:t>
+            </a:r>
+            <a:pPr algn="l" indent="0" marL="0">
+              <a:lnSpc>
+                <a:spcPts val="1620"/>
+              </a:lnSpc>
+              <a:spcAft>
+                <a:spcPts val="300"/>
+              </a:spcAft>
+              <a:buNone/>
+            </a:pPr>
+            <a:r>
+              <a:rPr lang="en-US" sz="1200" dirty="0">
+                <a:solidFill>
+                  <a:srgbClr val="1C2833"/>
+                </a:solidFill>
+                <a:latin typeface="Arial" pitchFamily="34" charset="0"/>
+                <a:ea typeface="Arial" pitchFamily="34" charset="-122"/>
+                <a:cs typeface="Arial" pitchFamily="34" charset="-120"/>
+              </a:rPr>
+              <a:t> — "sitting near"; philosophical dialogues</a:t>
+            </a:r>
+            <a:endParaRPr lang="en-US" sz="1200" dirty="0"/>
+          </a:p>
+        </p:txBody>
+      </p:sp>
+      <p:sp>
+        <p:nvSpPr>
+          <p:cNvPr id="5" name="Text 3"/>
           <p:cNvSpPr/>
           <p:nvPr/>
         </p:nvSpPr>
@@ -3740,7 +6320,7 @@
                 <a:ea typeface="Georgia" pitchFamily="34" charset="-122"/>
                 <a:cs typeface="Georgia" pitchFamily="34" charset="-120"/>
               </a:rPr>
-              <a:t>Warm-up (5 min)</a:t>
+              <a:t>Flow</a:t>
             </a:r>
             <a:endParaRPr lang="en-US" sz="1800" dirty="0"/>
           </a:p>
@@ -3749,54 +6329,6 @@
       <p:sp>
         <p:nvSpPr>
           <p:cNvPr id="4" name="Text 2"/>
-          <p:cNvSpPr/>
-          <p:nvPr/>
-        </p:nvSpPr>
-        <p:spPr>
-          <a:xfrm>
-            <a:off x="406301" y="870942"/>
-            <a:ext cx="8498026" cy="213271"/>
-          </a:xfrm>
-          <a:prstGeom prst="rect">
-            <a:avLst/>
-          </a:prstGeom>
-          <a:noFill/>
-          <a:ln/>
-        </p:spPr>
-        <p:txBody>
-          <a:bodyPr wrap="square" lIns="0" tIns="0" rIns="0" bIns="0" rtlCol="0" anchor="t"/>
-          <a:lstStyle/>
-          <a:p>
-            <a:pPr algn="l" indent="0" marL="0">
-              <a:lnSpc>
-                <a:spcPts val="1680"/>
-              </a:lnSpc>
-              <a:spcBef>
-                <a:spcPts val="300"/>
-              </a:spcBef>
-              <a:spcAft>
-                <a:spcPts val="300"/>
-              </a:spcAft>
-              <a:buNone/>
-            </a:pPr>
-            <a:r>
-              <a:rPr lang="en-US" sz="1200" dirty="0">
-                <a:solidFill>
-                  <a:srgbClr val="1C2833"/>
-                </a:solidFill>
-                <a:latin typeface="Arial" pitchFamily="34" charset="0"/>
-                <a:ea typeface="Arial" pitchFamily="34" charset="-122"/>
-                <a:cs typeface="Arial" pitchFamily="34" charset="-120"/>
-              </a:rPr>
-              <a:t>Daily prompt — 2 students share.</a:t>
-            </a:r>
-            <a:endParaRPr lang="en-US" sz="1200" dirty="0"/>
-          </a:p>
-        </p:txBody>
-      </p:sp>
-      <p:sp>
-        <p:nvSpPr>
-          <p:cNvPr id="5" name="Text 3"/>
           <p:cNvSpPr/>
           <p:nvPr/>
         </p:nvSpPr>
@@ -3946,7 +6478,7 @@
                 <a:ea typeface="Georgia" pitchFamily="34" charset="-122"/>
                 <a:cs typeface="Georgia" pitchFamily="34" charset="-120"/>
               </a:rPr>
-              <a:t>Activity (15 min) — Layer mapping</a:t>
+              <a:t>Warm-up (5 min)</a:t>
             </a:r>
             <a:endParaRPr lang="en-US" sz="1800" dirty="0"/>
           </a:p>
@@ -3961,7 +6493,7 @@
         <p:spPr>
           <a:xfrm>
             <a:off x="406301" y="870942"/>
-            <a:ext cx="8498026" cy="426541"/>
+            <a:ext cx="8498026" cy="213271"/>
           </a:xfrm>
           <a:prstGeom prst="rect">
             <a:avLst/>
@@ -3994,7 +6526,7 @@
                 <a:ea typeface="Arial" pitchFamily="34" charset="-122"/>
                 <a:cs typeface="Arial" pitchFamily="34" charset="-120"/>
               </a:rPr>
-              <a:t>Students draw their own version of the "4 Vedas × 4 layers" grid in their notebook. For each cell, they write one one-line description.</a:t>
+              <a:t>Daily prompt — 2 students share.</a:t>
             </a:r>
             <a:endParaRPr lang="en-US" sz="1200" dirty="0"/>
           </a:p>
@@ -4003,77 +6535,6 @@
       <p:sp>
         <p:nvSpPr>
           <p:cNvPr id="5" name="Text 3"/>
-          <p:cNvSpPr/>
-          <p:nvPr/>
-        </p:nvSpPr>
-        <p:spPr>
-          <a:xfrm>
-            <a:off x="406301" y="1373684"/>
-            <a:ext cx="8498026" cy="426541"/>
-          </a:xfrm>
-          <a:prstGeom prst="rect">
-            <a:avLst/>
-          </a:prstGeom>
-          <a:noFill/>
-          <a:ln/>
-        </p:spPr>
-        <p:txBody>
-          <a:bodyPr wrap="square" lIns="0" tIns="0" rIns="0" bIns="0" rtlCol="0" anchor="t"/>
-          <a:lstStyle/>
-          <a:p>
-            <a:pPr algn="l" indent="0" marL="0">
-              <a:lnSpc>
-                <a:spcPts val="1680"/>
-              </a:lnSpc>
-              <a:spcBef>
-                <a:spcPts val="300"/>
-              </a:spcBef>
-              <a:spcAft>
-                <a:spcPts val="300"/>
-              </a:spcAft>
-              <a:buNone/>
-            </a:pPr>
-            <a:r>
-              <a:rPr lang="en-US" sz="1200" dirty="0">
-                <a:solidFill>
-                  <a:srgbClr val="1C2833"/>
-                </a:solidFill>
-                <a:latin typeface="Arial" pitchFamily="34" charset="0"/>
-                <a:ea typeface="Arial" pitchFamily="34" charset="-122"/>
-                <a:cs typeface="Arial" pitchFamily="34" charset="-120"/>
-              </a:rPr>
-              <a:t>Then they pick ONE cell and write a 1-sentence answer to: </a:t>
-            </a:r>
-            <a:pPr algn="l" indent="0" marL="0">
-              <a:lnSpc>
-                <a:spcPts val="1680"/>
-              </a:lnSpc>
-              <a:spcBef>
-                <a:spcPts val="300"/>
-              </a:spcBef>
-              <a:spcAft>
-                <a:spcPts val="300"/>
-              </a:spcAft>
-              <a:buNone/>
-            </a:pPr>
-            <a:r>
-              <a:rPr lang="en-US" sz="1200" i="1" dirty="0">
-                <a:solidFill>
-                  <a:srgbClr val="1C2833"/>
-                </a:solidFill>
-                <a:latin typeface="Arial" pitchFamily="34" charset="0"/>
-                <a:ea typeface="Arial" pitchFamily="34" charset="-122"/>
-                <a:cs typeface="Arial" pitchFamily="34" charset="-120"/>
-              </a:rPr>
-              <a:t>"What might someone studying THIS layer be trying to understand?"</a:t>
-            </a:r>
-            <a:endParaRPr lang="en-US" sz="1200" dirty="0"/>
-          </a:p>
-        </p:txBody>
-      </p:sp>
-      <p:sp>
-        <p:nvSpPr>
-          <p:cNvPr id="6" name="Text 4"/>
           <p:cNvSpPr/>
           <p:nvPr/>
         </p:nvSpPr>
@@ -4223,7 +6684,7 @@
                 <a:ea typeface="Georgia" pitchFamily="34" charset="-122"/>
                 <a:cs typeface="Georgia" pitchFamily="34" charset="-120"/>
               </a:rPr>
-              <a:t>Wrap-up (5 min)</a:t>
+              <a:t>Core (20 min)</a:t>
             </a:r>
             <a:endParaRPr lang="en-US" sz="1800" dirty="0"/>
           </a:p>
@@ -4237,8 +6698,8 @@
         </p:nvSpPr>
         <p:spPr>
           <a:xfrm>
-            <a:off x="406301" y="870942"/>
-            <a:ext cx="8498026" cy="426541"/>
+            <a:off x="634901" y="883593"/>
+            <a:ext cx="8102798" cy="281880"/>
           </a:xfrm>
           <a:prstGeom prst="rect">
             <a:avLst/>
@@ -4250,20 +6711,18 @@
           <a:bodyPr wrap="square" lIns="0" tIns="0" rIns="0" bIns="0" rtlCol="0" anchor="t"/>
           <a:lstStyle/>
           <a:p>
-            <a:pPr algn="l" indent="0" marL="0">
-              <a:lnSpc>
-                <a:spcPts val="1680"/>
-              </a:lnSpc>
-              <a:spcBef>
-                <a:spcPts val="300"/>
-              </a:spcBef>
-              <a:spcAft>
-                <a:spcPts val="300"/>
-              </a:spcAft>
-              <a:buNone/>
-            </a:pPr>
-            <a:r>
-              <a:rPr lang="en-US" sz="1200" dirty="0">
+            <a:pPr algn="l" marL="342900" indent="-342900">
+              <a:lnSpc>
+                <a:spcPts val="1620"/>
+              </a:lnSpc>
+              <a:spcAft>
+                <a:spcPts val="300"/>
+              </a:spcAft>
+              <a:buSzPct val="100000"/>
+              <a:buChar char="•"/>
+            </a:pPr>
+            <a:r>
+              <a:rPr lang="en-US" sz="1200" b="1" dirty="0">
                 <a:solidFill>
                   <a:srgbClr val="1C2833"/>
                 </a:solidFill>
@@ -4271,8 +6730,33 @@
                 <a:ea typeface="Arial" pitchFamily="34" charset="-122"/>
                 <a:cs typeface="Arial" pitchFamily="34" charset="-120"/>
               </a:rPr>
-              <a:t>– Quick exit ticket (oral): "Name one Veda and one layer." – Preview Day 3: </a:t>
-            </a:r>
+              <a:t>The Four Vedas (write on board):</a:t>
+            </a:r>
+            <a:endParaRPr lang="en-US" sz="1200" dirty="0"/>
+          </a:p>
+        </p:txBody>
+      </p:sp>
+      <p:sp>
+        <p:nvSpPr>
+          <p:cNvPr id="5" name="Text 3"/>
+          <p:cNvSpPr/>
+          <p:nvPr/>
+        </p:nvSpPr>
+        <p:spPr>
+          <a:xfrm>
+            <a:off x="406301" y="1254323"/>
+            <a:ext cx="8498026" cy="213271"/>
+          </a:xfrm>
+          <a:prstGeom prst="rect">
+            <a:avLst/>
+          </a:prstGeom>
+          <a:noFill/>
+          <a:ln/>
+        </p:spPr>
+        <p:txBody>
+          <a:bodyPr wrap="square" lIns="0" tIns="0" rIns="0" bIns="0" rtlCol="0" anchor="t"/>
+          <a:lstStyle/>
+          <a:p>
             <a:pPr algn="l" indent="0" marL="0">
               <a:lnSpc>
                 <a:spcPts val="1680"/>
@@ -4294,7 +6778,7 @@
                 <a:ea typeface="Arial" pitchFamily="34" charset="-122"/>
                 <a:cs typeface="Arial" pitchFamily="34" charset="-120"/>
               </a:rPr>
-              <a:t>"Tomorrow — the Vedangas, six auxiliary disciplines that grew up around the Vedas."</a:t>
+              <a:t>Each row: Veda · Focus.</a:t>
             </a:r>
             <a:endParaRPr lang="en-US" sz="1200" dirty="0"/>
           </a:p>
@@ -4302,7 +6786,205 @@
       </p:sp>
       <p:sp>
         <p:nvSpPr>
-          <p:cNvPr id="5" name="Text 3"/>
+          <p:cNvPr id="6" name="Text 4"/>
+          <p:cNvSpPr/>
+          <p:nvPr/>
+        </p:nvSpPr>
+        <p:spPr>
+          <a:xfrm>
+            <a:off x="634901" y="1556445"/>
+            <a:ext cx="8102798" cy="1013222"/>
+          </a:xfrm>
+          <a:prstGeom prst="rect">
+            <a:avLst/>
+          </a:prstGeom>
+          <a:noFill/>
+          <a:ln/>
+        </p:spPr>
+        <p:txBody>
+          <a:bodyPr wrap="square" lIns="0" tIns="0" rIns="0" bIns="0" rtlCol="0" anchor="t"/>
+          <a:lstStyle/>
+          <a:p>
+            <a:pPr algn="l" marL="342900" indent="-342900">
+              <a:lnSpc>
+                <a:spcPts val="1620"/>
+              </a:lnSpc>
+              <a:spcAft>
+                <a:spcPts val="300"/>
+              </a:spcAft>
+              <a:buSzPct val="100000"/>
+              <a:buChar char="•"/>
+            </a:pPr>
+            <a:r>
+              <a:rPr lang="en-US" sz="1200" i="1" dirty="0">
+                <a:solidFill>
+                  <a:srgbClr val="1C2833"/>
+                </a:solidFill>
+                <a:latin typeface="Arial" pitchFamily="34" charset="0"/>
+                <a:ea typeface="Arial" pitchFamily="34" charset="-122"/>
+                <a:cs typeface="Arial" pitchFamily="34" charset="-120"/>
+              </a:rPr>
+              <a:t>Ṛg Veda</a:t>
+            </a:r>
+            <a:pPr algn="l" indent="0" marL="0">
+              <a:lnSpc>
+                <a:spcPts val="1620"/>
+              </a:lnSpc>
+              <a:spcAft>
+                <a:spcPts val="300"/>
+              </a:spcAft>
+              <a:buNone/>
+            </a:pPr>
+            <a:r>
+              <a:rPr lang="en-US" sz="1200" dirty="0">
+                <a:solidFill>
+                  <a:srgbClr val="1C2833"/>
+                </a:solidFill>
+                <a:latin typeface="Arial" pitchFamily="34" charset="0"/>
+                <a:ea typeface="Arial" pitchFamily="34" charset="-122"/>
+                <a:cs typeface="Arial" pitchFamily="34" charset="-120"/>
+              </a:rPr>
+              <a:t> — Hymns of praise (~1500–1200 BCE)</a:t>
+            </a:r>
+            <a:endParaRPr lang="en-US" sz="1200" dirty="0"/>
+          </a:p>
+          <a:p>
+            <a:pPr algn="l" marL="342900" indent="-342900">
+              <a:lnSpc>
+                <a:spcPts val="1620"/>
+              </a:lnSpc>
+              <a:spcAft>
+                <a:spcPts val="300"/>
+              </a:spcAft>
+              <a:buSzPct val="100000"/>
+              <a:buChar char="•"/>
+            </a:pPr>
+            <a:r>
+              <a:rPr lang="en-US" sz="1200" i="1" dirty="0">
+                <a:solidFill>
+                  <a:srgbClr val="1C2833"/>
+                </a:solidFill>
+                <a:latin typeface="Arial" pitchFamily="34" charset="0"/>
+                <a:ea typeface="Arial" pitchFamily="34" charset="-122"/>
+                <a:cs typeface="Arial" pitchFamily="34" charset="-120"/>
+              </a:rPr>
+              <a:t>Yajur Veda</a:t>
+            </a:r>
+            <a:pPr algn="l" indent="0" marL="0">
+              <a:lnSpc>
+                <a:spcPts val="1620"/>
+              </a:lnSpc>
+              <a:spcAft>
+                <a:spcPts val="300"/>
+              </a:spcAft>
+              <a:buNone/>
+            </a:pPr>
+            <a:r>
+              <a:rPr lang="en-US" sz="1200" dirty="0">
+                <a:solidFill>
+                  <a:srgbClr val="1C2833"/>
+                </a:solidFill>
+                <a:latin typeface="Arial" pitchFamily="34" charset="0"/>
+                <a:ea typeface="Arial" pitchFamily="34" charset="-122"/>
+                <a:cs typeface="Arial" pitchFamily="34" charset="-120"/>
+              </a:rPr>
+              <a:t> — Ritual formulas</a:t>
+            </a:r>
+            <a:endParaRPr lang="en-US" sz="1200" dirty="0"/>
+          </a:p>
+          <a:p>
+            <a:pPr algn="l" marL="342900" indent="-342900">
+              <a:lnSpc>
+                <a:spcPts val="1620"/>
+              </a:lnSpc>
+              <a:spcAft>
+                <a:spcPts val="300"/>
+              </a:spcAft>
+              <a:buSzPct val="100000"/>
+              <a:buChar char="•"/>
+            </a:pPr>
+            <a:r>
+              <a:rPr lang="en-US" sz="1200" i="1" dirty="0">
+                <a:solidFill>
+                  <a:srgbClr val="1C2833"/>
+                </a:solidFill>
+                <a:latin typeface="Arial" pitchFamily="34" charset="0"/>
+                <a:ea typeface="Arial" pitchFamily="34" charset="-122"/>
+                <a:cs typeface="Arial" pitchFamily="34" charset="-120"/>
+              </a:rPr>
+              <a:t>Sāma Veda</a:t>
+            </a:r>
+            <a:pPr algn="l" indent="0" marL="0">
+              <a:lnSpc>
+                <a:spcPts val="1620"/>
+              </a:lnSpc>
+              <a:spcAft>
+                <a:spcPts val="300"/>
+              </a:spcAft>
+              <a:buNone/>
+            </a:pPr>
+            <a:r>
+              <a:rPr lang="en-US" sz="1200" dirty="0">
+                <a:solidFill>
+                  <a:srgbClr val="1C2833"/>
+                </a:solidFill>
+                <a:latin typeface="Arial" pitchFamily="34" charset="0"/>
+                <a:ea typeface="Arial" pitchFamily="34" charset="-122"/>
+                <a:cs typeface="Arial" pitchFamily="34" charset="-120"/>
+              </a:rPr>
+              <a:t> — Chants set to melody</a:t>
+            </a:r>
+            <a:endParaRPr lang="en-US" sz="1200" dirty="0"/>
+          </a:p>
+          <a:p>
+            <a:pPr algn="l" marL="342900" indent="-342900">
+              <a:lnSpc>
+                <a:spcPts val="1620"/>
+              </a:lnSpc>
+              <a:spcAft>
+                <a:spcPts val="300"/>
+              </a:spcAft>
+              <a:buSzPct val="100000"/>
+              <a:buChar char="•"/>
+            </a:pPr>
+            <a:r>
+              <a:rPr lang="en-US" sz="1200" i="1" dirty="0">
+                <a:solidFill>
+                  <a:srgbClr val="1C2833"/>
+                </a:solidFill>
+                <a:latin typeface="Arial" pitchFamily="34" charset="0"/>
+                <a:ea typeface="Arial" pitchFamily="34" charset="-122"/>
+                <a:cs typeface="Arial" pitchFamily="34" charset="-120"/>
+              </a:rPr>
+              <a:t>Atharva Veda</a:t>
+            </a:r>
+            <a:pPr algn="l" indent="0" marL="0">
+              <a:lnSpc>
+                <a:spcPts val="1620"/>
+              </a:lnSpc>
+              <a:spcAft>
+                <a:spcPts val="300"/>
+              </a:spcAft>
+              <a:buNone/>
+            </a:pPr>
+            <a:r>
+              <a:rPr lang="en-US" sz="1200" dirty="0">
+                <a:solidFill>
+                  <a:srgbClr val="1C2833"/>
+                </a:solidFill>
+                <a:latin typeface="Arial" pitchFamily="34" charset="0"/>
+                <a:ea typeface="Arial" pitchFamily="34" charset="-122"/>
+                <a:cs typeface="Arial" pitchFamily="34" charset="-120"/>
+              </a:rPr>
+              <a:t> — Spells, incantations, early medical</a:t>
+            </a:r>
+            <a:endParaRPr lang="en-US" sz="1200" dirty="0"/>
+          </a:p>
+        </p:txBody>
+      </p:sp>
+      <p:sp>
+        <p:nvSpPr>
+          <p:cNvPr id="7" name="Text 5"/>
           <p:cNvSpPr/>
           <p:nvPr/>
         </p:nvSpPr>
@@ -4452,7 +7134,7 @@
                 <a:ea typeface="Georgia" pitchFamily="34" charset="-122"/>
                 <a:cs typeface="Georgia" pitchFamily="34" charset="-120"/>
               </a:rPr>
-              <a:t>Student-facing content</a:t>
+              <a:t>Core (20 min) (cont.)</a:t>
             </a:r>
             <a:endParaRPr lang="en-US" sz="1800" dirty="0"/>
           </a:p>
@@ -4466,476 +7148,47 @@
         </p:nvSpPr>
         <p:spPr>
           <a:xfrm>
-            <a:off x="406301" y="883593"/>
-            <a:ext cx="8331398" cy="2112169"/>
-          </a:xfrm>
-          <a:prstGeom prst="rect">
-            <a:avLst/>
-          </a:prstGeom>
-          <a:solidFill>
-            <a:srgbClr val="F4F8F9"/>
-          </a:solidFill>
-          <a:ln/>
-        </p:spPr>
-        <p:txBody>
-          <a:bodyPr wrap="square" rtlCol="0" anchor="ctr"/>
-          <a:lstStyle/>
-          <a:p>
-            <a:pPr indent="0" marL="0">
-              <a:buNone/>
-            </a:pPr>
-            <a:endParaRPr lang="en-US" dirty="0"/>
-          </a:p>
-        </p:txBody>
-      </p:sp>
-      <p:sp>
-        <p:nvSpPr>
-          <p:cNvPr id="5" name="Shape 3"/>
-          <p:cNvSpPr/>
-          <p:nvPr/>
-        </p:nvSpPr>
-        <p:spPr>
-          <a:xfrm>
-            <a:off x="434876" y="883593"/>
-            <a:ext cx="0" cy="2112169"/>
-          </a:xfrm>
-          <a:prstGeom prst="line">
+            <a:off x="634901" y="883593"/>
+            <a:ext cx="8102798" cy="281880"/>
+          </a:xfrm>
+          <a:prstGeom prst="rect">
             <a:avLst/>
           </a:prstGeom>
           <a:noFill/>
-          <a:ln w="57150">
-            <a:solidFill>
-              <a:srgbClr val="FE4447"/>
-            </a:solidFill>
-            <a:prstDash val="solid"/>
-          </a:ln>
-        </p:spPr>
-      </p:sp>
-      <p:sp>
-        <p:nvSpPr>
-          <p:cNvPr id="6" name="Text 4"/>
-          <p:cNvSpPr/>
-          <p:nvPr/>
-        </p:nvSpPr>
-        <p:spPr>
-          <a:xfrm>
-            <a:off x="692051" y="1074093"/>
-            <a:ext cx="7973389" cy="230981"/>
-          </a:xfrm>
-          <a:prstGeom prst="rect">
-            <a:avLst/>
-          </a:prstGeom>
-          <a:noFill/>
           <a:ln/>
         </p:spPr>
         <p:txBody>
           <a:bodyPr wrap="square" lIns="0" tIns="0" rIns="0" bIns="0" rtlCol="0" anchor="t"/>
           <a:lstStyle/>
           <a:p>
-            <a:pPr algn="l" indent="0" marL="0">
-              <a:lnSpc>
-                <a:spcPts val="1820"/>
-              </a:lnSpc>
-              <a:spcBef>
-                <a:spcPts val="300"/>
-              </a:spcBef>
-              <a:spcAft>
-                <a:spcPts val="300"/>
-              </a:spcAft>
-              <a:buNone/>
-            </a:pPr>
-            <a:r>
-              <a:rPr lang="en-US" sz="1300" b="1" i="1" dirty="0">
-                <a:solidFill>
-                  <a:srgbClr val="1C2833"/>
-                </a:solidFill>
-                <a:latin typeface="Georgia" pitchFamily="34" charset="0"/>
-                <a:ea typeface="Georgia" pitchFamily="34" charset="-122"/>
-                <a:cs typeface="Georgia" pitchFamily="34" charset="-120"/>
-              </a:rPr>
-              <a:t>The Four Vedas</a:t>
-            </a:r>
-            <a:endParaRPr lang="en-US" sz="1300" dirty="0"/>
-          </a:p>
-        </p:txBody>
-      </p:sp>
-      <p:sp>
-        <p:nvSpPr>
-          <p:cNvPr id="7" name="Text 5"/>
-          <p:cNvSpPr/>
-          <p:nvPr/>
-        </p:nvSpPr>
-        <p:spPr>
-          <a:xfrm>
-            <a:off x="692051" y="1343174"/>
-            <a:ext cx="7973389" cy="461963"/>
-          </a:xfrm>
-          <a:prstGeom prst="rect">
-            <a:avLst/>
-          </a:prstGeom>
-          <a:noFill/>
-          <a:ln/>
-        </p:spPr>
-        <p:txBody>
-          <a:bodyPr wrap="square" lIns="0" tIns="0" rIns="0" bIns="0" rtlCol="0" anchor="t"/>
-          <a:lstStyle/>
-          <a:p>
-            <a:pPr algn="l" indent="0" marL="0">
-              <a:lnSpc>
-                <a:spcPts val="1820"/>
-              </a:lnSpc>
-              <a:spcBef>
-                <a:spcPts val="300"/>
-              </a:spcBef>
-              <a:spcAft>
-                <a:spcPts val="300"/>
-              </a:spcAft>
-              <a:buNone/>
-            </a:pPr>
-            <a:r>
-              <a:rPr lang="en-US" sz="1300" i="1" dirty="0">
-                <a:solidFill>
-                  <a:srgbClr val="1C2833"/>
-                </a:solidFill>
-                <a:latin typeface="Georgia" pitchFamily="34" charset="0"/>
-                <a:ea typeface="Georgia" pitchFamily="34" charset="-122"/>
-                <a:cs typeface="Georgia" pitchFamily="34" charset="-120"/>
-              </a:rPr>
-              <a:t>| Veda | What it contains | |------|------------------| | Ṛg | Hymns of praise (~1500–1200 BCE) | | Yajur | Ritual formulas | | Sāma | Chants and melody | | Atharva | Spells, early medicine |</a:t>
-            </a:r>
-            <a:endParaRPr lang="en-US" sz="1300" dirty="0"/>
-          </a:p>
-        </p:txBody>
-      </p:sp>
-      <p:sp>
-        <p:nvSpPr>
-          <p:cNvPr id="8" name="Text 6"/>
-          <p:cNvSpPr/>
-          <p:nvPr/>
-        </p:nvSpPr>
-        <p:spPr>
-          <a:xfrm>
-            <a:off x="692051" y="1843236"/>
-            <a:ext cx="7973389" cy="461963"/>
-          </a:xfrm>
-          <a:prstGeom prst="rect">
-            <a:avLst/>
-          </a:prstGeom>
-          <a:noFill/>
-          <a:ln/>
-        </p:spPr>
-        <p:txBody>
-          <a:bodyPr wrap="square" lIns="0" tIns="0" rIns="0" bIns="0" rtlCol="0" anchor="t"/>
-          <a:lstStyle/>
-          <a:p>
-            <a:pPr algn="l" indent="0" marL="0">
-              <a:lnSpc>
-                <a:spcPts val="1820"/>
-              </a:lnSpc>
-              <a:spcBef>
-                <a:spcPts val="300"/>
-              </a:spcBef>
-              <a:spcAft>
-                <a:spcPts val="300"/>
-              </a:spcAft>
-              <a:buNone/>
-            </a:pPr>
-            <a:r>
-              <a:rPr lang="en-US" sz="1300" dirty="0">
-                <a:solidFill>
-                  <a:srgbClr val="1C2833"/>
-                </a:solidFill>
-                <a:latin typeface="Georgia" pitchFamily="34" charset="0"/>
-                <a:ea typeface="Georgia" pitchFamily="34" charset="-122"/>
-                <a:cs typeface="Georgia" pitchFamily="34" charset="-120"/>
-              </a:rPr>
-              <a:t>Each Veda has FOUR layers: </a:t>
-            </a:r>
-            <a:pPr algn="l" indent="0" marL="0">
-              <a:lnSpc>
-                <a:spcPts val="1820"/>
-              </a:lnSpc>
-              <a:spcBef>
-                <a:spcPts val="300"/>
-              </a:spcBef>
-              <a:spcAft>
-                <a:spcPts val="300"/>
-              </a:spcAft>
-              <a:buNone/>
-            </a:pPr>
-            <a:r>
-              <a:rPr lang="en-US" sz="1300" b="1" i="1" dirty="0">
-                <a:solidFill>
-                  <a:srgbClr val="1C2833"/>
-                </a:solidFill>
-                <a:latin typeface="Georgia" pitchFamily="34" charset="0"/>
-                <a:ea typeface="Georgia" pitchFamily="34" charset="-122"/>
-                <a:cs typeface="Georgia" pitchFamily="34" charset="-120"/>
-              </a:rPr>
-              <a:t>Saṃhitā</a:t>
-            </a:r>
-            <a:pPr algn="l" indent="0" marL="0">
-              <a:lnSpc>
-                <a:spcPts val="1820"/>
-              </a:lnSpc>
-              <a:spcBef>
-                <a:spcPts val="300"/>
-              </a:spcBef>
-              <a:spcAft>
-                <a:spcPts val="300"/>
-              </a:spcAft>
-              <a:buNone/>
-            </a:pPr>
-            <a:r>
-              <a:rPr lang="en-US" sz="1300" dirty="0">
-                <a:solidFill>
-                  <a:srgbClr val="1C2833"/>
-                </a:solidFill>
-                <a:latin typeface="Georgia" pitchFamily="34" charset="0"/>
-                <a:ea typeface="Georgia" pitchFamily="34" charset="-122"/>
-                <a:cs typeface="Georgia" pitchFamily="34" charset="-120"/>
-              </a:rPr>
-              <a:t> (hymns) → </a:t>
-            </a:r>
-            <a:pPr algn="l" indent="0" marL="0">
-              <a:lnSpc>
-                <a:spcPts val="1820"/>
-              </a:lnSpc>
-              <a:spcBef>
-                <a:spcPts val="300"/>
-              </a:spcBef>
-              <a:spcAft>
-                <a:spcPts val="300"/>
-              </a:spcAft>
-              <a:buNone/>
-            </a:pPr>
-            <a:r>
-              <a:rPr lang="en-US" sz="1300" b="1" i="1" dirty="0">
-                <a:solidFill>
-                  <a:srgbClr val="1C2833"/>
-                </a:solidFill>
-                <a:latin typeface="Georgia" pitchFamily="34" charset="0"/>
-                <a:ea typeface="Georgia" pitchFamily="34" charset="-122"/>
-                <a:cs typeface="Georgia" pitchFamily="34" charset="-120"/>
-              </a:rPr>
-              <a:t>Brāhmaṇa</a:t>
-            </a:r>
-            <a:pPr algn="l" indent="0" marL="0">
-              <a:lnSpc>
-                <a:spcPts val="1820"/>
-              </a:lnSpc>
-              <a:spcBef>
-                <a:spcPts val="300"/>
-              </a:spcBef>
-              <a:spcAft>
-                <a:spcPts val="300"/>
-              </a:spcAft>
-              <a:buNone/>
-            </a:pPr>
-            <a:r>
-              <a:rPr lang="en-US" sz="1300" dirty="0">
-                <a:solidFill>
-                  <a:srgbClr val="1C2833"/>
-                </a:solidFill>
-                <a:latin typeface="Georgia" pitchFamily="34" charset="0"/>
-                <a:ea typeface="Georgia" pitchFamily="34" charset="-122"/>
-                <a:cs typeface="Georgia" pitchFamily="34" charset="-120"/>
-              </a:rPr>
-              <a:t> (ritual commentary) → </a:t>
-            </a:r>
-            <a:pPr algn="l" indent="0" marL="0">
-              <a:lnSpc>
-                <a:spcPts val="1820"/>
-              </a:lnSpc>
-              <a:spcBef>
-                <a:spcPts val="300"/>
-              </a:spcBef>
-              <a:spcAft>
-                <a:spcPts val="300"/>
-              </a:spcAft>
-              <a:buNone/>
-            </a:pPr>
-            <a:r>
-              <a:rPr lang="en-US" sz="1300" b="1" i="1" dirty="0">
-                <a:solidFill>
-                  <a:srgbClr val="1C2833"/>
-                </a:solidFill>
-                <a:latin typeface="Georgia" pitchFamily="34" charset="0"/>
-                <a:ea typeface="Georgia" pitchFamily="34" charset="-122"/>
-                <a:cs typeface="Georgia" pitchFamily="34" charset="-120"/>
-              </a:rPr>
-              <a:t>Āraṇyaka</a:t>
-            </a:r>
-            <a:pPr algn="l" indent="0" marL="0">
-              <a:lnSpc>
-                <a:spcPts val="1820"/>
-              </a:lnSpc>
-              <a:spcBef>
-                <a:spcPts val="300"/>
-              </a:spcBef>
-              <a:spcAft>
-                <a:spcPts val="300"/>
-              </a:spcAft>
-              <a:buNone/>
-            </a:pPr>
-            <a:r>
-              <a:rPr lang="en-US" sz="1300" dirty="0">
-                <a:solidFill>
-                  <a:srgbClr val="1C2833"/>
-                </a:solidFill>
-                <a:latin typeface="Georgia" pitchFamily="34" charset="0"/>
-                <a:ea typeface="Georgia" pitchFamily="34" charset="-122"/>
-                <a:cs typeface="Georgia" pitchFamily="34" charset="-120"/>
-              </a:rPr>
-              <a:t> (forest texts) → </a:t>
-            </a:r>
-            <a:pPr algn="l" indent="0" marL="0">
-              <a:lnSpc>
-                <a:spcPts val="1820"/>
-              </a:lnSpc>
-              <a:spcBef>
-                <a:spcPts val="300"/>
-              </a:spcBef>
-              <a:spcAft>
-                <a:spcPts val="300"/>
-              </a:spcAft>
-              <a:buNone/>
-            </a:pPr>
-            <a:r>
-              <a:rPr lang="en-US" sz="1300" b="1" i="1" dirty="0">
-                <a:solidFill>
-                  <a:srgbClr val="1C2833"/>
-                </a:solidFill>
-                <a:latin typeface="Georgia" pitchFamily="34" charset="0"/>
-                <a:ea typeface="Georgia" pitchFamily="34" charset="-122"/>
-                <a:cs typeface="Georgia" pitchFamily="34" charset="-120"/>
-              </a:rPr>
-              <a:t>Upaniṣad</a:t>
-            </a:r>
-            <a:pPr algn="l" indent="0" marL="0">
-              <a:lnSpc>
-                <a:spcPts val="1820"/>
-              </a:lnSpc>
-              <a:spcBef>
-                <a:spcPts val="300"/>
-              </a:spcBef>
-              <a:spcAft>
-                <a:spcPts val="300"/>
-              </a:spcAft>
-              <a:buNone/>
-            </a:pPr>
-            <a:r>
-              <a:rPr lang="en-US" sz="1300" dirty="0">
-                <a:solidFill>
-                  <a:srgbClr val="1C2833"/>
-                </a:solidFill>
-                <a:latin typeface="Georgia" pitchFamily="34" charset="0"/>
-                <a:ea typeface="Georgia" pitchFamily="34" charset="-122"/>
-                <a:cs typeface="Georgia" pitchFamily="34" charset="-120"/>
-              </a:rPr>
-              <a:t> (philosophical dialogues).</a:t>
-            </a:r>
-            <a:endParaRPr lang="en-US" sz="1300" dirty="0"/>
-          </a:p>
-        </p:txBody>
-      </p:sp>
-      <p:sp>
-        <p:nvSpPr>
-          <p:cNvPr id="9" name="Text 7"/>
-          <p:cNvSpPr/>
-          <p:nvPr/>
-        </p:nvSpPr>
-        <p:spPr>
-          <a:xfrm>
-            <a:off x="692051" y="2343299"/>
-            <a:ext cx="7973389" cy="461963"/>
-          </a:xfrm>
-          <a:prstGeom prst="rect">
-            <a:avLst/>
-          </a:prstGeom>
-          <a:noFill/>
-          <a:ln/>
-        </p:spPr>
-        <p:txBody>
-          <a:bodyPr wrap="square" lIns="0" tIns="0" rIns="0" bIns="0" rtlCol="0" anchor="t"/>
-          <a:lstStyle/>
-          <a:p>
-            <a:pPr algn="l" indent="0" marL="0">
-              <a:lnSpc>
-                <a:spcPts val="1820"/>
-              </a:lnSpc>
-              <a:spcBef>
-                <a:spcPts val="300"/>
-              </a:spcBef>
-              <a:spcAft>
-                <a:spcPts val="300"/>
-              </a:spcAft>
-              <a:buNone/>
-            </a:pPr>
-            <a:r>
-              <a:rPr lang="en-US" sz="1300" dirty="0">
-                <a:solidFill>
-                  <a:srgbClr val="1C2833"/>
-                </a:solidFill>
-                <a:latin typeface="Georgia" pitchFamily="34" charset="0"/>
-                <a:ea typeface="Georgia" pitchFamily="34" charset="-122"/>
-                <a:cs typeface="Georgia" pitchFamily="34" charset="-120"/>
-              </a:rPr>
-              <a:t>The </a:t>
-            </a:r>
-            <a:pPr algn="l" indent="0" marL="0">
-              <a:lnSpc>
-                <a:spcPts val="1820"/>
-              </a:lnSpc>
-              <a:spcBef>
-                <a:spcPts val="300"/>
-              </a:spcBef>
-              <a:spcAft>
-                <a:spcPts val="300"/>
-              </a:spcAft>
-              <a:buNone/>
-            </a:pPr>
-            <a:r>
-              <a:rPr lang="en-US" sz="1300" i="1" dirty="0">
-                <a:solidFill>
-                  <a:srgbClr val="1C2833"/>
-                </a:solidFill>
-                <a:latin typeface="Georgia" pitchFamily="34" charset="0"/>
-                <a:ea typeface="Georgia" pitchFamily="34" charset="-122"/>
-                <a:cs typeface="Georgia" pitchFamily="34" charset="-120"/>
-              </a:rPr>
-              <a:t>intellectual</a:t>
-            </a:r>
-            <a:pPr algn="l" indent="0" marL="0">
-              <a:lnSpc>
-                <a:spcPts val="1820"/>
-              </a:lnSpc>
-              <a:spcBef>
-                <a:spcPts val="300"/>
-              </a:spcBef>
-              <a:spcAft>
-                <a:spcPts val="300"/>
-              </a:spcAft>
-              <a:buNone/>
-            </a:pPr>
-            <a:r>
-              <a:rPr lang="en-US" sz="1300" dirty="0">
-                <a:solidFill>
-                  <a:srgbClr val="1C2833"/>
-                </a:solidFill>
-                <a:latin typeface="Georgia" pitchFamily="34" charset="0"/>
-                <a:ea typeface="Georgia" pitchFamily="34" charset="-122"/>
-                <a:cs typeface="Georgia" pitchFamily="34" charset="-120"/>
-              </a:rPr>
-              <a:t> contributions of the Veda include: Sanskrit grammar, early astronomy, early medicine, and Upanishadic philosophy.</a:t>
-            </a:r>
-            <a:endParaRPr lang="en-US" sz="1300" dirty="0"/>
-          </a:p>
-        </p:txBody>
-      </p:sp>
-      <p:sp>
-        <p:nvSpPr>
-          <p:cNvPr id="10" name="Text 8"/>
+            <a:pPr algn="l" marL="342900" indent="-342900">
+              <a:lnSpc>
+                <a:spcPts val="1620"/>
+              </a:lnSpc>
+              <a:spcAft>
+                <a:spcPts val="300"/>
+              </a:spcAft>
+              <a:buSzPct val="100000"/>
+              <a:buChar char="•"/>
+            </a:pPr>
+            <a:r>
+              <a:rPr lang="en-US" sz="1200" b="1" dirty="0">
+                <a:solidFill>
+                  <a:srgbClr val="1C2833"/>
+                </a:solidFill>
+                <a:latin typeface="Arial" pitchFamily="34" charset="0"/>
+                <a:ea typeface="Arial" pitchFamily="34" charset="-122"/>
+                <a:cs typeface="Arial" pitchFamily="34" charset="-120"/>
+              </a:rPr>
+              <a:t>Four layers within each Veda:</a:t>
+            </a:r>
+            <a:endParaRPr lang="en-US" sz="1200" dirty="0"/>
+          </a:p>
+        </p:txBody>
+      </p:sp>
+      <p:sp>
+        <p:nvSpPr>
+          <p:cNvPr id="5" name="Text 3"/>
           <p:cNvSpPr/>
           <p:nvPr/>
         </p:nvSpPr>
@@ -5085,7 +7338,7 @@
                 <a:ea typeface="Georgia" pitchFamily="34" charset="-122"/>
                 <a:cs typeface="Georgia" pitchFamily="34" charset="-120"/>
               </a:rPr>
-              <a:t>Homework</a:t>
+              <a:t>Core (20 min) (cont.)</a:t>
             </a:r>
             <a:endParaRPr lang="en-US" sz="1800" dirty="0"/>
           </a:p>
@@ -5099,13 +7352,66 @@
         </p:nvSpPr>
         <p:spPr>
           <a:xfrm>
-            <a:off x="406301" y="870942"/>
-            <a:ext cx="8498026" cy="426541"/>
-          </a:xfrm>
-          <a:prstGeom prst="rect">
+            <a:off x="406301" y="883593"/>
+            <a:ext cx="8331398" cy="1475929"/>
+          </a:xfrm>
+          <a:prstGeom prst="rect">
+            <a:avLst/>
+          </a:prstGeom>
+          <a:solidFill>
+            <a:srgbClr val="F4F8F9"/>
+          </a:solidFill>
+          <a:ln/>
+        </p:spPr>
+        <p:txBody>
+          <a:bodyPr wrap="square" rtlCol="0" anchor="ctr"/>
+          <a:lstStyle/>
+          <a:p>
+            <a:pPr indent="0" marL="0">
+              <a:buNone/>
+            </a:pPr>
+            <a:endParaRPr lang="en-US" dirty="0"/>
+          </a:p>
+        </p:txBody>
+      </p:sp>
+      <p:sp>
+        <p:nvSpPr>
+          <p:cNvPr id="5" name="Shape 3"/>
+          <p:cNvSpPr/>
+          <p:nvPr/>
+        </p:nvSpPr>
+        <p:spPr>
+          <a:xfrm>
+            <a:off x="430113" y="883593"/>
+            <a:ext cx="0" cy="1475929"/>
+          </a:xfrm>
+          <a:prstGeom prst="line">
             <a:avLst/>
           </a:prstGeom>
           <a:noFill/>
+          <a:ln w="47625">
+            <a:solidFill>
+              <a:srgbClr val="277884"/>
+            </a:solidFill>
+            <a:prstDash val="solid"/>
+          </a:ln>
+        </p:spPr>
+      </p:sp>
+      <p:sp>
+        <p:nvSpPr>
+          <p:cNvPr id="6" name="Text 4"/>
+          <p:cNvSpPr/>
+          <p:nvPr/>
+        </p:nvSpPr>
+        <p:spPr>
+          <a:xfrm>
+            <a:off x="631627" y="1010543"/>
+            <a:ext cx="8086939" cy="174575"/>
+          </a:xfrm>
+          <a:prstGeom prst="rect">
+            <a:avLst/>
+          </a:prstGeom>
+          <a:noFill/>
           <a:ln/>
         </p:spPr>
         <p:txBody>
@@ -5114,34 +7420,280 @@
           <a:p>
             <a:pPr algn="l" indent="0" marL="0">
               <a:lnSpc>
-                <a:spcPts val="1680"/>
-              </a:lnSpc>
-              <a:spcBef>
-                <a:spcPts val="300"/>
-              </a:spcBef>
-              <a:spcAft>
-                <a:spcPts val="300"/>
-              </a:spcAft>
-              <a:buNone/>
-            </a:pPr>
-            <a:r>
-              <a:rPr lang="en-US" sz="1200" dirty="0">
-                <a:solidFill>
-                  <a:srgbClr val="1C2833"/>
-                </a:solidFill>
-                <a:latin typeface="Arial" pitchFamily="34" charset="0"/>
-                <a:ea typeface="Arial" pitchFamily="34" charset="-122"/>
-                <a:cs typeface="Arial" pitchFamily="34" charset="-120"/>
-              </a:rPr>
-              <a:t>– Find ONE Upaniṣad name (e.g. Īśa, Kena, Kaṭha, Praśna, Muṇḍaka, Māṇḍūkya — there are 108 traditionally, with 13 considered "principal"). Bring tomorrow.</a:t>
-            </a:r>
-            <a:endParaRPr lang="en-US" sz="1200" dirty="0"/>
-          </a:p>
-        </p:txBody>
-      </p:sp>
-      <p:sp>
-        <p:nvSpPr>
-          <p:cNvPr id="5" name="Text 3"/>
+                <a:spcPts val="1375"/>
+              </a:lnSpc>
+              <a:buNone/>
+            </a:pPr>
+            <a:r>
+              <a:rPr lang="en-US" sz="1100" dirty="0">
+                <a:solidFill>
+                  <a:srgbClr val="1C2833"/>
+                </a:solidFill>
+                <a:latin typeface="Courier New" pitchFamily="34" charset="0"/>
+                <a:ea typeface="Courier New" pitchFamily="34" charset="-122"/>
+                <a:cs typeface="Courier New" pitchFamily="34" charset="-120"/>
+              </a:rPr>
+              <a:t>Saṃhitā (hymns)</a:t>
+            </a:r>
+            <a:endParaRPr lang="en-US" sz="1100" dirty="0"/>
+          </a:p>
+        </p:txBody>
+      </p:sp>
+      <p:sp>
+        <p:nvSpPr>
+          <p:cNvPr id="7" name="Text 5"/>
+          <p:cNvSpPr/>
+          <p:nvPr/>
+        </p:nvSpPr>
+        <p:spPr>
+          <a:xfrm>
+            <a:off x="631627" y="1185118"/>
+            <a:ext cx="8086939" cy="174575"/>
+          </a:xfrm>
+          <a:prstGeom prst="rect">
+            <a:avLst/>
+          </a:prstGeom>
+          <a:noFill/>
+          <a:ln/>
+        </p:spPr>
+        <p:txBody>
+          <a:bodyPr wrap="square" lIns="0" tIns="0" rIns="0" bIns="0" rtlCol="0" anchor="t"/>
+          <a:lstStyle/>
+          <a:p>
+            <a:pPr algn="l" indent="0" marL="0">
+              <a:lnSpc>
+                <a:spcPts val="1375"/>
+              </a:lnSpc>
+              <a:buNone/>
+            </a:pPr>
+            <a:r>
+              <a:rPr lang="en-US" sz="1100" dirty="0">
+                <a:solidFill>
+                  <a:srgbClr val="1C2833"/>
+                </a:solidFill>
+                <a:latin typeface="Courier New" pitchFamily="34" charset="0"/>
+                <a:ea typeface="Courier New" pitchFamily="34" charset="-122"/>
+                <a:cs typeface="Courier New" pitchFamily="34" charset="-120"/>
+              </a:rPr>
+              <a:t>↓</a:t>
+            </a:r>
+            <a:endParaRPr lang="en-US" sz="1100" dirty="0"/>
+          </a:p>
+        </p:txBody>
+      </p:sp>
+      <p:sp>
+        <p:nvSpPr>
+          <p:cNvPr id="8" name="Text 6"/>
+          <p:cNvSpPr/>
+          <p:nvPr/>
+        </p:nvSpPr>
+        <p:spPr>
+          <a:xfrm>
+            <a:off x="631627" y="1359694"/>
+            <a:ext cx="8086939" cy="174575"/>
+          </a:xfrm>
+          <a:prstGeom prst="rect">
+            <a:avLst/>
+          </a:prstGeom>
+          <a:noFill/>
+          <a:ln/>
+        </p:spPr>
+        <p:txBody>
+          <a:bodyPr wrap="square" lIns="0" tIns="0" rIns="0" bIns="0" rtlCol="0" anchor="t"/>
+          <a:lstStyle/>
+          <a:p>
+            <a:pPr algn="l" indent="0" marL="0">
+              <a:lnSpc>
+                <a:spcPts val="1375"/>
+              </a:lnSpc>
+              <a:buNone/>
+            </a:pPr>
+            <a:r>
+              <a:rPr lang="en-US" sz="1100" dirty="0">
+                <a:solidFill>
+                  <a:srgbClr val="1C2833"/>
+                </a:solidFill>
+                <a:latin typeface="Courier New" pitchFamily="34" charset="0"/>
+                <a:ea typeface="Courier New" pitchFamily="34" charset="-122"/>
+                <a:cs typeface="Courier New" pitchFamily="34" charset="-120"/>
+              </a:rPr>
+              <a:t>Brāhmaṇa (ritual commentary)</a:t>
+            </a:r>
+            <a:endParaRPr lang="en-US" sz="1100" dirty="0"/>
+          </a:p>
+        </p:txBody>
+      </p:sp>
+      <p:sp>
+        <p:nvSpPr>
+          <p:cNvPr id="9" name="Text 7"/>
+          <p:cNvSpPr/>
+          <p:nvPr/>
+        </p:nvSpPr>
+        <p:spPr>
+          <a:xfrm>
+            <a:off x="631627" y="1534269"/>
+            <a:ext cx="8086939" cy="174575"/>
+          </a:xfrm>
+          <a:prstGeom prst="rect">
+            <a:avLst/>
+          </a:prstGeom>
+          <a:noFill/>
+          <a:ln/>
+        </p:spPr>
+        <p:txBody>
+          <a:bodyPr wrap="square" lIns="0" tIns="0" rIns="0" bIns="0" rtlCol="0" anchor="t"/>
+          <a:lstStyle/>
+          <a:p>
+            <a:pPr algn="l" indent="0" marL="0">
+              <a:lnSpc>
+                <a:spcPts val="1375"/>
+              </a:lnSpc>
+              <a:buNone/>
+            </a:pPr>
+            <a:r>
+              <a:rPr lang="en-US" sz="1100" dirty="0">
+                <a:solidFill>
+                  <a:srgbClr val="1C2833"/>
+                </a:solidFill>
+                <a:latin typeface="Courier New" pitchFamily="34" charset="0"/>
+                <a:ea typeface="Courier New" pitchFamily="34" charset="-122"/>
+                <a:cs typeface="Courier New" pitchFamily="34" charset="-120"/>
+              </a:rPr>
+              <a:t>↓</a:t>
+            </a:r>
+            <a:endParaRPr lang="en-US" sz="1100" dirty="0"/>
+          </a:p>
+        </p:txBody>
+      </p:sp>
+      <p:sp>
+        <p:nvSpPr>
+          <p:cNvPr id="10" name="Text 8"/>
+          <p:cNvSpPr/>
+          <p:nvPr/>
+        </p:nvSpPr>
+        <p:spPr>
+          <a:xfrm>
+            <a:off x="631627" y="1708845"/>
+            <a:ext cx="8086939" cy="174575"/>
+          </a:xfrm>
+          <a:prstGeom prst="rect">
+            <a:avLst/>
+          </a:prstGeom>
+          <a:noFill/>
+          <a:ln/>
+        </p:spPr>
+        <p:txBody>
+          <a:bodyPr wrap="square" lIns="0" tIns="0" rIns="0" bIns="0" rtlCol="0" anchor="t"/>
+          <a:lstStyle/>
+          <a:p>
+            <a:pPr algn="l" indent="0" marL="0">
+              <a:lnSpc>
+                <a:spcPts val="1375"/>
+              </a:lnSpc>
+              <a:buNone/>
+            </a:pPr>
+            <a:r>
+              <a:rPr lang="en-US" sz="1100" dirty="0">
+                <a:solidFill>
+                  <a:srgbClr val="1C2833"/>
+                </a:solidFill>
+                <a:latin typeface="Courier New" pitchFamily="34" charset="0"/>
+                <a:ea typeface="Courier New" pitchFamily="34" charset="-122"/>
+                <a:cs typeface="Courier New" pitchFamily="34" charset="-120"/>
+              </a:rPr>
+              <a:t>Āraṇyaka (intermediate philosophy)</a:t>
+            </a:r>
+            <a:endParaRPr lang="en-US" sz="1100" dirty="0"/>
+          </a:p>
+        </p:txBody>
+      </p:sp>
+      <p:sp>
+        <p:nvSpPr>
+          <p:cNvPr id="11" name="Text 9"/>
+          <p:cNvSpPr/>
+          <p:nvPr/>
+        </p:nvSpPr>
+        <p:spPr>
+          <a:xfrm>
+            <a:off x="631627" y="1883420"/>
+            <a:ext cx="8086939" cy="174575"/>
+          </a:xfrm>
+          <a:prstGeom prst="rect">
+            <a:avLst/>
+          </a:prstGeom>
+          <a:noFill/>
+          <a:ln/>
+        </p:spPr>
+        <p:txBody>
+          <a:bodyPr wrap="square" lIns="0" tIns="0" rIns="0" bIns="0" rtlCol="0" anchor="t"/>
+          <a:lstStyle/>
+          <a:p>
+            <a:pPr algn="l" indent="0" marL="0">
+              <a:lnSpc>
+                <a:spcPts val="1375"/>
+              </a:lnSpc>
+              <a:buNone/>
+            </a:pPr>
+            <a:r>
+              <a:rPr lang="en-US" sz="1100" dirty="0">
+                <a:solidFill>
+                  <a:srgbClr val="1C2833"/>
+                </a:solidFill>
+                <a:latin typeface="Courier New" pitchFamily="34" charset="0"/>
+                <a:ea typeface="Courier New" pitchFamily="34" charset="-122"/>
+                <a:cs typeface="Courier New" pitchFamily="34" charset="-120"/>
+              </a:rPr>
+              <a:t>↓</a:t>
+            </a:r>
+            <a:endParaRPr lang="en-US" sz="1100" dirty="0"/>
+          </a:p>
+        </p:txBody>
+      </p:sp>
+      <p:sp>
+        <p:nvSpPr>
+          <p:cNvPr id="12" name="Text 10"/>
+          <p:cNvSpPr/>
+          <p:nvPr/>
+        </p:nvSpPr>
+        <p:spPr>
+          <a:xfrm>
+            <a:off x="631627" y="2057995"/>
+            <a:ext cx="8086939" cy="174575"/>
+          </a:xfrm>
+          <a:prstGeom prst="rect">
+            <a:avLst/>
+          </a:prstGeom>
+          <a:noFill/>
+          <a:ln/>
+        </p:spPr>
+        <p:txBody>
+          <a:bodyPr wrap="square" lIns="0" tIns="0" rIns="0" bIns="0" rtlCol="0" anchor="t"/>
+          <a:lstStyle/>
+          <a:p>
+            <a:pPr algn="l" indent="0" marL="0">
+              <a:lnSpc>
+                <a:spcPts val="1375"/>
+              </a:lnSpc>
+              <a:buNone/>
+            </a:pPr>
+            <a:r>
+              <a:rPr lang="en-US" sz="1100" dirty="0">
+                <a:solidFill>
+                  <a:srgbClr val="1C2833"/>
+                </a:solidFill>
+                <a:latin typeface="Courier New" pitchFamily="34" charset="0"/>
+                <a:ea typeface="Courier New" pitchFamily="34" charset="-122"/>
+                <a:cs typeface="Courier New" pitchFamily="34" charset="-120"/>
+              </a:rPr>
+              <a:t>Upaniṣad (philosophical dialogues — "Vedānta" = "end of the Vedas")</a:t>
+            </a:r>
+            <a:endParaRPr lang="en-US" sz="1100" dirty="0"/>
+          </a:p>
+        </p:txBody>
+      </p:sp>
+      <p:sp>
+        <p:nvSpPr>
+          <p:cNvPr id="13" name="Text 11"/>
           <p:cNvSpPr/>
           <p:nvPr/>
         </p:nvSpPr>
